--- a/Group-30/Presentation/Group30-CodeGen-Capstone-Presentation.pptx
+++ b/Group-30/Presentation/Group30-CodeGen-Capstone-Presentation.pptx
@@ -5,19 +5,19 @@
     <p:sldMasterId id="2147483648" r:id="rId1"/>
   </p:sldMasterIdLst>
   <p:sldIdLst>
-    <p:sldId id="256" r:id="rId7"/>
-    <p:sldId id="257" r:id="rId8"/>
-    <p:sldId id="258" r:id="rId9"/>
-    <p:sldId id="259" r:id="rId10"/>
-    <p:sldId id="260" r:id="rId11"/>
-    <p:sldId id="261" r:id="rId12"/>
-    <p:sldId id="262" r:id="rId13"/>
-    <p:sldId id="263" r:id="rId14"/>
-    <p:sldId id="264" r:id="rId15"/>
-    <p:sldId id="265" r:id="rId16"/>
-    <p:sldId id="266" r:id="rId17"/>
+    <p:sldId id="256" r:id="rId2"/>
+    <p:sldId id="257" r:id="rId3"/>
+    <p:sldId id="258" r:id="rId4"/>
+    <p:sldId id="259" r:id="rId5"/>
+    <p:sldId id="260" r:id="rId6"/>
+    <p:sldId id="261" r:id="rId7"/>
+    <p:sldId id="262" r:id="rId8"/>
+    <p:sldId id="263" r:id="rId9"/>
+    <p:sldId id="264" r:id="rId10"/>
+    <p:sldId id="265" r:id="rId11"/>
+    <p:sldId id="266" r:id="rId12"/>
   </p:sldIdLst>
-  <p:sldSz cx="12191695" cy="6858000" type="screen4x3"/>
+  <p:sldSz cx="12192000" cy="6858000"/>
   <p:notesSz cx="6858000" cy="9144000"/>
   <p:defaultTextStyle>
     <a:defPPr>
@@ -114,6 +114,22 @@
       </a:defRPr>
     </a:lvl9pPr>
   </p:defaultTextStyle>
+  <p:extLst>
+    <p:ext uri="{EFAFB233-063F-42B5-8137-9DF3F51BA10A}">
+      <p15:sldGuideLst xmlns:p15="http://schemas.microsoft.com/office/powerpoint/2012/main">
+        <p15:guide id="1" orient="horz" pos="2160">
+          <p15:clr>
+            <a:srgbClr val="A4A3A4"/>
+          </p15:clr>
+        </p15:guide>
+        <p15:guide id="2" pos="2880">
+          <p15:clr>
+            <a:srgbClr val="A4A3A4"/>
+          </p15:clr>
+        </p15:guide>
+      </p15:sldGuideLst>
+    </p:ext>
+  </p:extLst>
 </p:presentation>
 </file>
 
@@ -155,10 +171,9 @@
           <a:lstStyle/>
           <a:p>
             <a:r>
-              <a:rPr lang="en-US" smtClean="0"/>
+              <a:rPr lang="en-US"/>
               <a:t>Click to edit Master title style</a:t>
             </a:r>
-            <a:endParaRPr lang="en-US"/>
           </a:p>
         </p:txBody>
       </p:sp>
@@ -274,10 +289,9 @@
           </a:lstStyle>
           <a:p>
             <a:r>
-              <a:rPr lang="en-US" smtClean="0"/>
+              <a:rPr lang="en-US"/>
               <a:t>Click to edit Master subtitle style</a:t>
             </a:r>
-            <a:endParaRPr lang="en-US"/>
           </a:p>
         </p:txBody>
       </p:sp>
@@ -298,7 +312,7 @@
           <a:p>
             <a:fld id="{5BCAD085-E8A6-8845-BD4E-CB4CCA059FC4}" type="datetimeFigureOut">
               <a:rPr lang="en-US" smtClean="0"/>
-              <a:t>1/27/13</a:t>
+              <a:t>7/5/2026</a:t>
             </a:fld>
             <a:endParaRPr lang="en-US"/>
           </a:p>
@@ -392,10 +406,9 @@
           <a:lstStyle/>
           <a:p>
             <a:r>
-              <a:rPr lang="en-US" smtClean="0"/>
+              <a:rPr lang="en-US"/>
               <a:t>Click to edit Master title style</a:t>
             </a:r>
-            <a:endParaRPr lang="en-US"/>
           </a:p>
         </p:txBody>
       </p:sp>
@@ -416,38 +429,37 @@
           <a:p>
             <a:pPr lvl="0"/>
             <a:r>
-              <a:rPr lang="en-US" smtClean="0"/>
+              <a:rPr lang="en-US"/>
               <a:t>Click to edit Master text styles</a:t>
             </a:r>
           </a:p>
           <a:p>
             <a:pPr lvl="1"/>
             <a:r>
-              <a:rPr lang="en-US" smtClean="0"/>
+              <a:rPr lang="en-US"/>
               <a:t>Second level</a:t>
             </a:r>
           </a:p>
           <a:p>
             <a:pPr lvl="2"/>
             <a:r>
-              <a:rPr lang="en-US" smtClean="0"/>
+              <a:rPr lang="en-US"/>
               <a:t>Third level</a:t>
             </a:r>
           </a:p>
           <a:p>
             <a:pPr lvl="3"/>
             <a:r>
-              <a:rPr lang="en-US" smtClean="0"/>
+              <a:rPr lang="en-US"/>
               <a:t>Fourth level</a:t>
             </a:r>
           </a:p>
           <a:p>
             <a:pPr lvl="4"/>
             <a:r>
-              <a:rPr lang="en-US" smtClean="0"/>
+              <a:rPr lang="en-US"/>
               <a:t>Fifth level</a:t>
             </a:r>
-            <a:endParaRPr lang="en-US"/>
           </a:p>
         </p:txBody>
       </p:sp>
@@ -468,7 +480,7 @@
           <a:p>
             <a:fld id="{5BCAD085-E8A6-8845-BD4E-CB4CCA059FC4}" type="datetimeFigureOut">
               <a:rPr lang="en-US" smtClean="0"/>
-              <a:t>1/27/13</a:t>
+              <a:t>7/5/2026</a:t>
             </a:fld>
             <a:endParaRPr lang="en-US"/>
           </a:p>
@@ -567,10 +579,9 @@
           <a:lstStyle/>
           <a:p>
             <a:r>
-              <a:rPr lang="en-US" smtClean="0"/>
+              <a:rPr lang="en-US"/>
               <a:t>Click to edit Master title style</a:t>
             </a:r>
-            <a:endParaRPr lang="en-US"/>
           </a:p>
         </p:txBody>
       </p:sp>
@@ -596,38 +607,37 @@
           <a:p>
             <a:pPr lvl="0"/>
             <a:r>
-              <a:rPr lang="en-US" smtClean="0"/>
+              <a:rPr lang="en-US"/>
               <a:t>Click to edit Master text styles</a:t>
             </a:r>
           </a:p>
           <a:p>
             <a:pPr lvl="1"/>
             <a:r>
-              <a:rPr lang="en-US" smtClean="0"/>
+              <a:rPr lang="en-US"/>
               <a:t>Second level</a:t>
             </a:r>
           </a:p>
           <a:p>
             <a:pPr lvl="2"/>
             <a:r>
-              <a:rPr lang="en-US" smtClean="0"/>
+              <a:rPr lang="en-US"/>
               <a:t>Third level</a:t>
             </a:r>
           </a:p>
           <a:p>
             <a:pPr lvl="3"/>
             <a:r>
-              <a:rPr lang="en-US" smtClean="0"/>
+              <a:rPr lang="en-US"/>
               <a:t>Fourth level</a:t>
             </a:r>
           </a:p>
           <a:p>
             <a:pPr lvl="4"/>
             <a:r>
-              <a:rPr lang="en-US" smtClean="0"/>
+              <a:rPr lang="en-US"/>
               <a:t>Fifth level</a:t>
             </a:r>
-            <a:endParaRPr lang="en-US"/>
           </a:p>
         </p:txBody>
       </p:sp>
@@ -648,7 +658,7 @@
           <a:p>
             <a:fld id="{5BCAD085-E8A6-8845-BD4E-CB4CCA059FC4}" type="datetimeFigureOut">
               <a:rPr lang="en-US" smtClean="0"/>
-              <a:t>1/27/13</a:t>
+              <a:t>7/5/2026</a:t>
             </a:fld>
             <a:endParaRPr lang="en-US"/>
           </a:p>
@@ -742,10 +752,9 @@
           <a:lstStyle/>
           <a:p>
             <a:r>
-              <a:rPr lang="en-US" smtClean="0"/>
+              <a:rPr lang="en-US"/>
               <a:t>Click to edit Master title style</a:t>
             </a:r>
-            <a:endParaRPr lang="en-US"/>
           </a:p>
         </p:txBody>
       </p:sp>
@@ -766,38 +775,37 @@
           <a:p>
             <a:pPr lvl="0"/>
             <a:r>
-              <a:rPr lang="en-US" smtClean="0"/>
+              <a:rPr lang="en-US"/>
               <a:t>Click to edit Master text styles</a:t>
             </a:r>
           </a:p>
           <a:p>
             <a:pPr lvl="1"/>
             <a:r>
-              <a:rPr lang="en-US" smtClean="0"/>
+              <a:rPr lang="en-US"/>
               <a:t>Second level</a:t>
             </a:r>
           </a:p>
           <a:p>
             <a:pPr lvl="2"/>
             <a:r>
-              <a:rPr lang="en-US" smtClean="0"/>
+              <a:rPr lang="en-US"/>
               <a:t>Third level</a:t>
             </a:r>
           </a:p>
           <a:p>
             <a:pPr lvl="3"/>
             <a:r>
-              <a:rPr lang="en-US" smtClean="0"/>
+              <a:rPr lang="en-US"/>
               <a:t>Fourth level</a:t>
             </a:r>
           </a:p>
           <a:p>
             <a:pPr lvl="4"/>
             <a:r>
-              <a:rPr lang="en-US" smtClean="0"/>
+              <a:rPr lang="en-US"/>
               <a:t>Fifth level</a:t>
             </a:r>
-            <a:endParaRPr lang="en-US"/>
           </a:p>
         </p:txBody>
       </p:sp>
@@ -818,7 +826,7 @@
           <a:p>
             <a:fld id="{5BCAD085-E8A6-8845-BD4E-CB4CCA059FC4}" type="datetimeFigureOut">
               <a:rPr lang="en-US" smtClean="0"/>
-              <a:t>1/27/13</a:t>
+              <a:t>7/5/2026</a:t>
             </a:fld>
             <a:endParaRPr lang="en-US"/>
           </a:p>
@@ -921,10 +929,9 @@
           </a:lstStyle>
           <a:p>
             <a:r>
-              <a:rPr lang="en-US" smtClean="0"/>
+              <a:rPr lang="en-US"/>
               <a:t>Click to edit Master title style</a:t>
             </a:r>
-            <a:endParaRPr lang="en-US"/>
           </a:p>
         </p:txBody>
       </p:sp>
@@ -1041,7 +1048,7 @@
           <a:p>
             <a:pPr lvl="0"/>
             <a:r>
-              <a:rPr lang="en-US" smtClean="0"/>
+              <a:rPr lang="en-US"/>
               <a:t>Click to edit Master text styles</a:t>
             </a:r>
           </a:p>
@@ -1064,7 +1071,7 @@
           <a:p>
             <a:fld id="{5BCAD085-E8A6-8845-BD4E-CB4CCA059FC4}" type="datetimeFigureOut">
               <a:rPr lang="en-US" smtClean="0"/>
-              <a:t>1/27/13</a:t>
+              <a:t>7/5/2026</a:t>
             </a:fld>
             <a:endParaRPr lang="en-US"/>
           </a:p>
@@ -1158,10 +1165,9 @@
           <a:lstStyle/>
           <a:p>
             <a:r>
-              <a:rPr lang="en-US" smtClean="0"/>
+              <a:rPr lang="en-US"/>
               <a:t>Click to edit Master title style</a:t>
             </a:r>
-            <a:endParaRPr lang="en-US"/>
           </a:p>
         </p:txBody>
       </p:sp>
@@ -1215,38 +1221,37 @@
           <a:p>
             <a:pPr lvl="0"/>
             <a:r>
-              <a:rPr lang="en-US" smtClean="0"/>
+              <a:rPr lang="en-US"/>
               <a:t>Click to edit Master text styles</a:t>
             </a:r>
           </a:p>
           <a:p>
             <a:pPr lvl="1"/>
             <a:r>
-              <a:rPr lang="en-US" smtClean="0"/>
+              <a:rPr lang="en-US"/>
               <a:t>Second level</a:t>
             </a:r>
           </a:p>
           <a:p>
             <a:pPr lvl="2"/>
             <a:r>
-              <a:rPr lang="en-US" smtClean="0"/>
+              <a:rPr lang="en-US"/>
               <a:t>Third level</a:t>
             </a:r>
           </a:p>
           <a:p>
             <a:pPr lvl="3"/>
             <a:r>
-              <a:rPr lang="en-US" smtClean="0"/>
+              <a:rPr lang="en-US"/>
               <a:t>Fourth level</a:t>
             </a:r>
           </a:p>
           <a:p>
             <a:pPr lvl="4"/>
             <a:r>
-              <a:rPr lang="en-US" smtClean="0"/>
+              <a:rPr lang="en-US"/>
               <a:t>Fifth level</a:t>
             </a:r>
-            <a:endParaRPr lang="en-US"/>
           </a:p>
         </p:txBody>
       </p:sp>
@@ -1300,38 +1305,37 @@
           <a:p>
             <a:pPr lvl="0"/>
             <a:r>
-              <a:rPr lang="en-US" smtClean="0"/>
+              <a:rPr lang="en-US"/>
               <a:t>Click to edit Master text styles</a:t>
             </a:r>
           </a:p>
           <a:p>
             <a:pPr lvl="1"/>
             <a:r>
-              <a:rPr lang="en-US" smtClean="0"/>
+              <a:rPr lang="en-US"/>
               <a:t>Second level</a:t>
             </a:r>
           </a:p>
           <a:p>
             <a:pPr lvl="2"/>
             <a:r>
-              <a:rPr lang="en-US" smtClean="0"/>
+              <a:rPr lang="en-US"/>
               <a:t>Third level</a:t>
             </a:r>
           </a:p>
           <a:p>
             <a:pPr lvl="3"/>
             <a:r>
-              <a:rPr lang="en-US" smtClean="0"/>
+              <a:rPr lang="en-US"/>
               <a:t>Fourth level</a:t>
             </a:r>
           </a:p>
           <a:p>
             <a:pPr lvl="4"/>
             <a:r>
-              <a:rPr lang="en-US" smtClean="0"/>
+              <a:rPr lang="en-US"/>
               <a:t>Fifth level</a:t>
             </a:r>
-            <a:endParaRPr lang="en-US"/>
           </a:p>
         </p:txBody>
       </p:sp>
@@ -1352,7 +1356,7 @@
           <a:p>
             <a:fld id="{5BCAD085-E8A6-8845-BD4E-CB4CCA059FC4}" type="datetimeFigureOut">
               <a:rPr lang="en-US" smtClean="0"/>
-              <a:t>1/27/13</a:t>
+              <a:t>7/5/2026</a:t>
             </a:fld>
             <a:endParaRPr lang="en-US"/>
           </a:p>
@@ -1450,10 +1454,9 @@
           </a:lstStyle>
           <a:p>
             <a:r>
-              <a:rPr lang="en-US" smtClean="0"/>
+              <a:rPr lang="en-US"/>
               <a:t>Click to edit Master title style</a:t>
             </a:r>
-            <a:endParaRPr lang="en-US"/>
           </a:p>
         </p:txBody>
       </p:sp>
@@ -1516,7 +1519,7 @@
           <a:p>
             <a:pPr lvl="0"/>
             <a:r>
-              <a:rPr lang="en-US" smtClean="0"/>
+              <a:rPr lang="en-US"/>
               <a:t>Click to edit Master text styles</a:t>
             </a:r>
           </a:p>
@@ -1572,38 +1575,37 @@
           <a:p>
             <a:pPr lvl="0"/>
             <a:r>
-              <a:rPr lang="en-US" smtClean="0"/>
+              <a:rPr lang="en-US"/>
               <a:t>Click to edit Master text styles</a:t>
             </a:r>
           </a:p>
           <a:p>
             <a:pPr lvl="1"/>
             <a:r>
-              <a:rPr lang="en-US" smtClean="0"/>
+              <a:rPr lang="en-US"/>
               <a:t>Second level</a:t>
             </a:r>
           </a:p>
           <a:p>
             <a:pPr lvl="2"/>
             <a:r>
-              <a:rPr lang="en-US" smtClean="0"/>
+              <a:rPr lang="en-US"/>
               <a:t>Third level</a:t>
             </a:r>
           </a:p>
           <a:p>
             <a:pPr lvl="3"/>
             <a:r>
-              <a:rPr lang="en-US" smtClean="0"/>
+              <a:rPr lang="en-US"/>
               <a:t>Fourth level</a:t>
             </a:r>
           </a:p>
           <a:p>
             <a:pPr lvl="4"/>
             <a:r>
-              <a:rPr lang="en-US" smtClean="0"/>
+              <a:rPr lang="en-US"/>
               <a:t>Fifth level</a:t>
             </a:r>
-            <a:endParaRPr lang="en-US"/>
           </a:p>
         </p:txBody>
       </p:sp>
@@ -1666,7 +1668,7 @@
           <a:p>
             <a:pPr lvl="0"/>
             <a:r>
-              <a:rPr lang="en-US" smtClean="0"/>
+              <a:rPr lang="en-US"/>
               <a:t>Click to edit Master text styles</a:t>
             </a:r>
           </a:p>
@@ -1722,38 +1724,37 @@
           <a:p>
             <a:pPr lvl="0"/>
             <a:r>
-              <a:rPr lang="en-US" smtClean="0"/>
+              <a:rPr lang="en-US"/>
               <a:t>Click to edit Master text styles</a:t>
             </a:r>
           </a:p>
           <a:p>
             <a:pPr lvl="1"/>
             <a:r>
-              <a:rPr lang="en-US" smtClean="0"/>
+              <a:rPr lang="en-US"/>
               <a:t>Second level</a:t>
             </a:r>
           </a:p>
           <a:p>
             <a:pPr lvl="2"/>
             <a:r>
-              <a:rPr lang="en-US" smtClean="0"/>
+              <a:rPr lang="en-US"/>
               <a:t>Third level</a:t>
             </a:r>
           </a:p>
           <a:p>
             <a:pPr lvl="3"/>
             <a:r>
-              <a:rPr lang="en-US" smtClean="0"/>
+              <a:rPr lang="en-US"/>
               <a:t>Fourth level</a:t>
             </a:r>
           </a:p>
           <a:p>
             <a:pPr lvl="4"/>
             <a:r>
-              <a:rPr lang="en-US" smtClean="0"/>
+              <a:rPr lang="en-US"/>
               <a:t>Fifth level</a:t>
             </a:r>
-            <a:endParaRPr lang="en-US"/>
           </a:p>
         </p:txBody>
       </p:sp>
@@ -1774,7 +1775,7 @@
           <a:p>
             <a:fld id="{5BCAD085-E8A6-8845-BD4E-CB4CCA059FC4}" type="datetimeFigureOut">
               <a:rPr lang="en-US" smtClean="0"/>
-              <a:t>1/27/13</a:t>
+              <a:t>7/5/2026</a:t>
             </a:fld>
             <a:endParaRPr lang="en-US"/>
           </a:p>
@@ -1868,10 +1869,9 @@
           <a:lstStyle/>
           <a:p>
             <a:r>
-              <a:rPr lang="en-US" smtClean="0"/>
+              <a:rPr lang="en-US"/>
               <a:t>Click to edit Master title style</a:t>
             </a:r>
-            <a:endParaRPr lang="en-US"/>
           </a:p>
         </p:txBody>
       </p:sp>
@@ -1892,7 +1892,7 @@
           <a:p>
             <a:fld id="{5BCAD085-E8A6-8845-BD4E-CB4CCA059FC4}" type="datetimeFigureOut">
               <a:rPr lang="en-US" smtClean="0"/>
-              <a:t>1/27/13</a:t>
+              <a:t>7/5/2026</a:t>
             </a:fld>
             <a:endParaRPr lang="en-US"/>
           </a:p>
@@ -1987,7 +1987,7 @@
           <a:p>
             <a:fld id="{5BCAD085-E8A6-8845-BD4E-CB4CCA059FC4}" type="datetimeFigureOut">
               <a:rPr lang="en-US" smtClean="0"/>
-              <a:t>1/27/13</a:t>
+              <a:t>7/5/2026</a:t>
             </a:fld>
             <a:endParaRPr lang="en-US"/>
           </a:p>
@@ -2090,10 +2090,9 @@
           </a:lstStyle>
           <a:p>
             <a:r>
-              <a:rPr lang="en-US" smtClean="0"/>
+              <a:rPr lang="en-US"/>
               <a:t>Click to edit Master title style</a:t>
             </a:r>
-            <a:endParaRPr lang="en-US"/>
           </a:p>
         </p:txBody>
       </p:sp>
@@ -2147,38 +2146,37 @@
           <a:p>
             <a:pPr lvl="0"/>
             <a:r>
-              <a:rPr lang="en-US" smtClean="0"/>
+              <a:rPr lang="en-US"/>
               <a:t>Click to edit Master text styles</a:t>
             </a:r>
           </a:p>
           <a:p>
             <a:pPr lvl="1"/>
             <a:r>
-              <a:rPr lang="en-US" smtClean="0"/>
+              <a:rPr lang="en-US"/>
               <a:t>Second level</a:t>
             </a:r>
           </a:p>
           <a:p>
             <a:pPr lvl="2"/>
             <a:r>
-              <a:rPr lang="en-US" smtClean="0"/>
+              <a:rPr lang="en-US"/>
               <a:t>Third level</a:t>
             </a:r>
           </a:p>
           <a:p>
             <a:pPr lvl="3"/>
             <a:r>
-              <a:rPr lang="en-US" smtClean="0"/>
+              <a:rPr lang="en-US"/>
               <a:t>Fourth level</a:t>
             </a:r>
           </a:p>
           <a:p>
             <a:pPr lvl="4"/>
             <a:r>
-              <a:rPr lang="en-US" smtClean="0"/>
+              <a:rPr lang="en-US"/>
               <a:t>Fifth level</a:t>
             </a:r>
-            <a:endParaRPr lang="en-US"/>
           </a:p>
         </p:txBody>
       </p:sp>
@@ -2241,7 +2239,7 @@
           <a:p>
             <a:pPr lvl="0"/>
             <a:r>
-              <a:rPr lang="en-US" smtClean="0"/>
+              <a:rPr lang="en-US"/>
               <a:t>Click to edit Master text styles</a:t>
             </a:r>
           </a:p>
@@ -2264,7 +2262,7 @@
           <a:p>
             <a:fld id="{5BCAD085-E8A6-8845-BD4E-CB4CCA059FC4}" type="datetimeFigureOut">
               <a:rPr lang="en-US" smtClean="0"/>
-              <a:t>1/27/13</a:t>
+              <a:t>7/5/2026</a:t>
             </a:fld>
             <a:endParaRPr lang="en-US"/>
           </a:p>
@@ -2367,10 +2365,9 @@
           </a:lstStyle>
           <a:p>
             <a:r>
-              <a:rPr lang="en-US" smtClean="0"/>
+              <a:rPr lang="en-US"/>
               <a:t>Click to edit Master title style</a:t>
             </a:r>
-            <a:endParaRPr lang="en-US"/>
           </a:p>
         </p:txBody>
       </p:sp>
@@ -2494,7 +2491,7 @@
           <a:p>
             <a:pPr lvl="0"/>
             <a:r>
-              <a:rPr lang="en-US" smtClean="0"/>
+              <a:rPr lang="en-US"/>
               <a:t>Click to edit Master text styles</a:t>
             </a:r>
           </a:p>
@@ -2517,7 +2514,7 @@
           <a:p>
             <a:fld id="{5BCAD085-E8A6-8845-BD4E-CB4CCA059FC4}" type="datetimeFigureOut">
               <a:rPr lang="en-US" smtClean="0"/>
-              <a:t>1/27/13</a:t>
+              <a:t>7/5/2026</a:t>
             </a:fld>
             <a:endParaRPr lang="en-US"/>
           </a:p>
@@ -2626,10 +2623,9 @@
           <a:lstStyle/>
           <a:p>
             <a:r>
-              <a:rPr lang="en-US" smtClean="0"/>
+              <a:rPr lang="en-US"/>
               <a:t>Click to edit Master title style</a:t>
             </a:r>
-            <a:endParaRPr lang="en-US"/>
           </a:p>
         </p:txBody>
       </p:sp>
@@ -2660,38 +2656,37 @@
           <a:p>
             <a:pPr lvl="0"/>
             <a:r>
-              <a:rPr lang="en-US" smtClean="0"/>
+              <a:rPr lang="en-US"/>
               <a:t>Click to edit Master text styles</a:t>
             </a:r>
           </a:p>
           <a:p>
             <a:pPr lvl="1"/>
             <a:r>
-              <a:rPr lang="en-US" smtClean="0"/>
+              <a:rPr lang="en-US"/>
               <a:t>Second level</a:t>
             </a:r>
           </a:p>
           <a:p>
             <a:pPr lvl="2"/>
             <a:r>
-              <a:rPr lang="en-US" smtClean="0"/>
+              <a:rPr lang="en-US"/>
               <a:t>Third level</a:t>
             </a:r>
           </a:p>
           <a:p>
             <a:pPr lvl="3"/>
             <a:r>
-              <a:rPr lang="en-US" smtClean="0"/>
+              <a:rPr lang="en-US"/>
               <a:t>Fourth level</a:t>
             </a:r>
           </a:p>
           <a:p>
             <a:pPr lvl="4"/>
             <a:r>
-              <a:rPr lang="en-US" smtClean="0"/>
+              <a:rPr lang="en-US"/>
               <a:t>Fifth level</a:t>
             </a:r>
-            <a:endParaRPr lang="en-US"/>
           </a:p>
         </p:txBody>
       </p:sp>
@@ -2730,7 +2725,7 @@
           <a:p>
             <a:fld id="{5BCAD085-E8A6-8845-BD4E-CB4CCA059FC4}" type="datetimeFigureOut">
               <a:rPr lang="en-US" smtClean="0"/>
-              <a:t>1/27/13</a:t>
+              <a:t>7/5/2026</a:t>
             </a:fld>
             <a:endParaRPr lang="en-US"/>
           </a:p>
@@ -3089,7 +3084,7 @@
 </file>
 
 <file path=ppt/slides/slide1.xml><?xml version="1.0" encoding="utf-8"?>
-<p:sld xmlns:a="http://schemas.openxmlformats.org/drawingml/2006/main" xmlns:p="http://schemas.openxmlformats.org/presentationml/2006/main" xmlns:r="http://schemas.openxmlformats.org/officeDocument/2006/relationships">
+<p:sld xmlns:a="http://schemas.openxmlformats.org/drawingml/2006/main" xmlns:r="http://schemas.openxmlformats.org/officeDocument/2006/relationships" xmlns:p="http://schemas.openxmlformats.org/presentationml/2006/main">
   <p:cSld>
     <p:bg>
       <p:bgPr>
@@ -3105,7 +3100,14 @@
         <p:cNvGrpSpPr/>
         <p:nvPr/>
       </p:nvGrpSpPr>
-      <p:grpSpPr/>
+      <p:grpSpPr>
+        <a:xfrm>
+          <a:off x="0" y="0"/>
+          <a:ext cx="0" cy="0"/>
+          <a:chOff x="0" y="0"/>
+          <a:chExt cx="0" cy="0"/>
+        </a:xfrm>
+      </p:grpSpPr>
       <p:sp>
         <p:nvSpPr>
           <p:cNvPr id="2" name="Rectangle 1"/>
@@ -3147,6 +3149,7 @@
           <a:lstStyle/>
           <a:p>
             <a:pPr algn="ctr"/>
+            <a:endParaRPr/>
           </a:p>
         </p:txBody>
       </p:sp>
@@ -3191,6 +3194,7 @@
           <a:lstStyle/>
           <a:p>
             <a:pPr algn="ctr"/>
+            <a:endParaRPr/>
           </a:p>
         </p:txBody>
       </p:sp>
@@ -3211,7 +3215,7 @@
           <a:noFill/>
         </p:spPr>
         <p:txBody>
-          <a:bodyPr wrap="square" anchor="t" lIns="0" rIns="0" tIns="0" bIns="0">
+          <a:bodyPr wrap="square" lIns="0" tIns="0" rIns="0" bIns="0" anchor="t">
             <a:spAutoFit/>
           </a:bodyPr>
           <a:lstStyle/>
@@ -3250,7 +3254,7 @@
           <a:noFill/>
         </p:spPr>
         <p:txBody>
-          <a:bodyPr wrap="square" anchor="t" lIns="0" rIns="0" tIns="0" bIns="0">
+          <a:bodyPr wrap="square" lIns="0" tIns="0" rIns="0" bIns="0" anchor="t">
             <a:spAutoFit/>
           </a:bodyPr>
           <a:lstStyle/>
@@ -3289,7 +3293,7 @@
           <a:noFill/>
         </p:spPr>
         <p:txBody>
-          <a:bodyPr wrap="square" anchor="t" lIns="0" rIns="0" tIns="0" bIns="0">
+          <a:bodyPr wrap="square" lIns="0" tIns="0" rIns="0" bIns="0" anchor="t">
             <a:spAutoFit/>
           </a:bodyPr>
           <a:lstStyle/>
@@ -3362,6 +3366,7 @@
           <a:lstStyle/>
           <a:p>
             <a:pPr algn="ctr"/>
+            <a:endParaRPr/>
           </a:p>
         </p:txBody>
       </p:sp>
@@ -3382,7 +3387,7 @@
           <a:noFill/>
         </p:spPr>
         <p:txBody>
-          <a:bodyPr wrap="square" anchor="t" lIns="0" rIns="0" tIns="0" bIns="0">
+          <a:bodyPr wrap="square" lIns="0" tIns="0" rIns="0" bIns="0" anchor="t">
             <a:spAutoFit/>
           </a:bodyPr>
           <a:lstStyle/>
@@ -3421,12 +3426,12 @@
           <a:noFill/>
         </p:spPr>
         <p:txBody>
-          <a:bodyPr wrap="square" anchor="t" lIns="0" rIns="0" tIns="0" bIns="0">
+          <a:bodyPr wrap="square" lIns="0" tIns="0" rIns="0" bIns="0" anchor="t">
             <a:spAutoFit/>
           </a:bodyPr>
           <a:lstStyle/>
           <a:p>
-            <a:pPr algn="l" marL="0" indent="0">
+            <a:pPr marL="0" indent="0" algn="l">
               <a:lnSpc>
                 <a:spcPct val="108000"/>
               </a:lnSpc>
@@ -3454,7 +3459,7 @@
             </a:r>
           </a:p>
           <a:p>
-            <a:pPr algn="l" marL="0" indent="0">
+            <a:pPr marL="0" indent="0" algn="l">
               <a:lnSpc>
                 <a:spcPct val="108000"/>
               </a:lnSpc>
@@ -3482,7 +3487,7 @@
             </a:r>
           </a:p>
           <a:p>
-            <a:pPr algn="l" marL="0" indent="0">
+            <a:pPr marL="0" indent="0" algn="l">
               <a:lnSpc>
                 <a:spcPct val="108000"/>
               </a:lnSpc>
@@ -3510,7 +3515,7 @@
             </a:r>
           </a:p>
           <a:p>
-            <a:pPr algn="l" marL="0" indent="0">
+            <a:pPr marL="0" indent="0" algn="l">
               <a:lnSpc>
                 <a:spcPct val="108000"/>
               </a:lnSpc>
@@ -3556,7 +3561,7 @@
           <a:noFill/>
         </p:spPr>
         <p:txBody>
-          <a:bodyPr wrap="square" anchor="t" lIns="0" rIns="0" tIns="0" bIns="0">
+          <a:bodyPr wrap="square" lIns="0" tIns="0" rIns="0" bIns="0" anchor="t">
             <a:spAutoFit/>
           </a:bodyPr>
           <a:lstStyle/>
@@ -3595,12 +3600,12 @@
           <a:noFill/>
         </p:spPr>
         <p:txBody>
-          <a:bodyPr wrap="square" anchor="t" lIns="0" rIns="0" tIns="0" bIns="0">
+          <a:bodyPr wrap="square" lIns="0" tIns="0" rIns="0" bIns="0" anchor="t">
             <a:spAutoFit/>
           </a:bodyPr>
           <a:lstStyle/>
           <a:p>
-            <a:pPr algn="l" marL="0" indent="0">
+            <a:pPr marL="0" indent="0" algn="l">
               <a:lnSpc>
                 <a:spcPct val="108000"/>
               </a:lnSpc>
@@ -3637,7 +3642,7 @@
             </a:r>
           </a:p>
           <a:p>
-            <a:pPr algn="l" marL="0" indent="0">
+            <a:pPr marL="0" indent="0" algn="l">
               <a:lnSpc>
                 <a:spcPct val="108000"/>
               </a:lnSpc>
@@ -3692,7 +3697,7 @@
           <a:noFill/>
         </p:spPr>
         <p:txBody>
-          <a:bodyPr wrap="square" anchor="t" lIns="0" rIns="0" tIns="0" bIns="0">
+          <a:bodyPr wrap="square" lIns="0" tIns="0" rIns="0" bIns="0" anchor="t">
             <a:spAutoFit/>
           </a:bodyPr>
           <a:lstStyle/>
@@ -3723,7 +3728,7 @@
 </file>
 
 <file path=ppt/slides/slide10.xml><?xml version="1.0" encoding="utf-8"?>
-<p:sld xmlns:a="http://schemas.openxmlformats.org/drawingml/2006/main" xmlns:p="http://schemas.openxmlformats.org/presentationml/2006/main" xmlns:r="http://schemas.openxmlformats.org/officeDocument/2006/relationships">
+<p:sld xmlns:a="http://schemas.openxmlformats.org/drawingml/2006/main" xmlns:r="http://schemas.openxmlformats.org/officeDocument/2006/relationships" xmlns:p="http://schemas.openxmlformats.org/presentationml/2006/main">
   <p:cSld>
     <p:bg>
       <p:bgPr>
@@ -3739,7 +3744,14 @@
         <p:cNvGrpSpPr/>
         <p:nvPr/>
       </p:nvGrpSpPr>
-      <p:grpSpPr/>
+      <p:grpSpPr>
+        <a:xfrm>
+          <a:off x="0" y="0"/>
+          <a:ext cx="0" cy="0"/>
+          <a:chOff x="0" y="0"/>
+          <a:chExt cx="0" cy="0"/>
+        </a:xfrm>
+      </p:grpSpPr>
       <p:sp>
         <p:nvSpPr>
           <p:cNvPr id="2" name="Rectangle 1"/>
@@ -3781,6 +3793,7 @@
           <a:lstStyle/>
           <a:p>
             <a:pPr algn="ctr"/>
+            <a:endParaRPr/>
           </a:p>
         </p:txBody>
       </p:sp>
@@ -3825,6 +3838,7 @@
           <a:lstStyle/>
           <a:p>
             <a:pPr algn="ctr"/>
+            <a:endParaRPr/>
           </a:p>
         </p:txBody>
       </p:sp>
@@ -3845,7 +3859,7 @@
           <a:noFill/>
         </p:spPr>
         <p:txBody>
-          <a:bodyPr wrap="square" anchor="t" lIns="0" rIns="0" tIns="0" bIns="0">
+          <a:bodyPr wrap="square" lIns="0" tIns="0" rIns="0" bIns="0" anchor="t">
             <a:spAutoFit/>
           </a:bodyPr>
           <a:lstStyle/>
@@ -3884,7 +3898,7 @@
           <a:noFill/>
         </p:spPr>
         <p:txBody>
-          <a:bodyPr wrap="square" anchor="t" lIns="0" rIns="0" tIns="0" bIns="0">
+          <a:bodyPr wrap="square" lIns="0" tIns="0" rIns="0" bIns="0" anchor="t">
             <a:spAutoFit/>
           </a:bodyPr>
           <a:lstStyle/>
@@ -3923,7 +3937,7 @@
           <a:noFill/>
         </p:spPr>
         <p:txBody>
-          <a:bodyPr wrap="square" anchor="t" lIns="0" rIns="0" tIns="0" bIns="0">
+          <a:bodyPr wrap="square" lIns="0" tIns="0" rIns="0" bIns="0" anchor="t">
             <a:spAutoFit/>
           </a:bodyPr>
           <a:lstStyle/>
@@ -3962,7 +3976,7 @@
           <a:noFill/>
         </p:spPr>
         <p:txBody>
-          <a:bodyPr wrap="square" anchor="t" lIns="0" rIns="0" tIns="0" bIns="0">
+          <a:bodyPr wrap="square" lIns="0" tIns="0" rIns="0" bIns="0" anchor="t">
             <a:spAutoFit/>
           </a:bodyPr>
           <a:lstStyle/>
@@ -4001,12 +4015,12 @@
           <a:noFill/>
         </p:spPr>
         <p:txBody>
-          <a:bodyPr wrap="square" anchor="t" lIns="0" rIns="0" tIns="0" bIns="0">
+          <a:bodyPr wrap="square" lIns="0" tIns="0" rIns="0" bIns="0" anchor="t">
             <a:spAutoFit/>
           </a:bodyPr>
           <a:lstStyle/>
           <a:p>
-            <a:pPr algn="l" marL="0" indent="0">
+            <a:pPr marL="0" indent="0" algn="l">
               <a:lnSpc>
                 <a:spcPct val="108000"/>
               </a:lnSpc>
@@ -4015,7 +4029,7 @@
               </a:spcAft>
             </a:pPr>
             <a:r>
-              <a:rPr sz="1550" b="1">
+              <a:rPr sz="1550" b="1" dirty="0">
                 <a:solidFill>
                   <a:srgbClr val="1F7A8C"/>
                 </a:solidFill>
@@ -4024,7 +4038,7 @@
               <a:t>▪  </a:t>
             </a:r>
             <a:r>
-              <a:rPr sz="1550" b="0" i="0">
+              <a:rPr sz="1550" b="0" i="0" dirty="0">
                 <a:solidFill>
                   <a:srgbClr val="1A1F2B"/>
                 </a:solidFill>
@@ -4034,7 +4048,7 @@
             </a:r>
           </a:p>
           <a:p>
-            <a:pPr algn="l" marL="0" indent="0">
+            <a:pPr marL="0" indent="0" algn="l">
               <a:lnSpc>
                 <a:spcPct val="108000"/>
               </a:lnSpc>
@@ -4043,7 +4057,7 @@
               </a:spcAft>
             </a:pPr>
             <a:r>
-              <a:rPr sz="1550" b="1">
+              <a:rPr sz="1550" b="1" dirty="0">
                 <a:solidFill>
                   <a:srgbClr val="1F7A8C"/>
                 </a:solidFill>
@@ -4052,7 +4066,7 @@
               <a:t>▪  </a:t>
             </a:r>
             <a:r>
-              <a:rPr sz="1550" b="0" i="0">
+              <a:rPr sz="1550" b="0" i="0" dirty="0">
                 <a:solidFill>
                   <a:srgbClr val="1A1F2B"/>
                 </a:solidFill>
@@ -4062,7 +4076,7 @@
             </a:r>
           </a:p>
           <a:p>
-            <a:pPr algn="l" marL="0" indent="0">
+            <a:pPr marL="0" indent="0" algn="l">
               <a:lnSpc>
                 <a:spcPct val="108000"/>
               </a:lnSpc>
@@ -4071,7 +4085,7 @@
               </a:spcAft>
             </a:pPr>
             <a:r>
-              <a:rPr sz="1550" b="1">
+              <a:rPr sz="1550" b="1" dirty="0">
                 <a:solidFill>
                   <a:srgbClr val="1F7A8C"/>
                 </a:solidFill>
@@ -4080,7 +4094,7 @@
               <a:t>▪  </a:t>
             </a:r>
             <a:r>
-              <a:rPr sz="1550" b="0" i="0">
+              <a:rPr sz="1550" b="0" i="0" dirty="0">
                 <a:solidFill>
                   <a:srgbClr val="1A1F2B"/>
                 </a:solidFill>
@@ -4090,7 +4104,7 @@
             </a:r>
           </a:p>
           <a:p>
-            <a:pPr algn="l" marL="0" indent="0">
+            <a:pPr marL="0" indent="0" algn="l">
               <a:lnSpc>
                 <a:spcPct val="108000"/>
               </a:lnSpc>
@@ -4099,7 +4113,7 @@
               </a:spcAft>
             </a:pPr>
             <a:r>
-              <a:rPr sz="1550" b="1">
+              <a:rPr sz="1550" b="1" dirty="0">
                 <a:solidFill>
                   <a:srgbClr val="1F7A8C"/>
                 </a:solidFill>
@@ -4108,17 +4122,35 @@
               <a:t>▪  </a:t>
             </a:r>
             <a:r>
-              <a:rPr sz="1550" b="0" i="0">
+              <a:rPr sz="1550" b="0" i="0" dirty="0">
                 <a:solidFill>
                   <a:srgbClr val="1A1F2B"/>
                 </a:solidFill>
                 <a:latin typeface="Calibri"/>
               </a:rPr>
-              <a:t>Tune the relative weighting of AST, GraphCodeBERTScore, and execution accuracy in the final accuracy metric</a:t>
-            </a:r>
-          </a:p>
-          <a:p>
-            <a:pPr algn="l" marL="0" indent="0">
+              <a:t>Tune the relative weighting of AST, </a:t>
+            </a:r>
+            <a:r>
+              <a:rPr sz="1550" b="0" i="0" dirty="0" err="1">
+                <a:solidFill>
+                  <a:srgbClr val="1A1F2B"/>
+                </a:solidFill>
+                <a:latin typeface="Calibri"/>
+              </a:rPr>
+              <a:t>GraphCodeBERTScore</a:t>
+            </a:r>
+            <a:r>
+              <a:rPr sz="1550" b="0" i="0" dirty="0">
+                <a:solidFill>
+                  <a:srgbClr val="1A1F2B"/>
+                </a:solidFill>
+                <a:latin typeface="Calibri"/>
+              </a:rPr>
+              <a:t>, and execution accuracy in the final accuracy metric</a:t>
+            </a:r>
+          </a:p>
+          <a:p>
+            <a:pPr marL="0" indent="0" algn="l">
               <a:lnSpc>
                 <a:spcPct val="108000"/>
               </a:lnSpc>
@@ -4127,7 +4159,7 @@
               </a:spcAft>
             </a:pPr>
             <a:r>
-              <a:rPr sz="1550" b="1">
+              <a:rPr sz="1550" b="1" dirty="0">
                 <a:solidFill>
                   <a:srgbClr val="1F7A8C"/>
                 </a:solidFill>
@@ -4136,7 +4168,7 @@
               <a:t>▪  </a:t>
             </a:r>
             <a:r>
-              <a:rPr sz="1550" b="0" i="0">
+              <a:rPr sz="1550" b="0" i="0" dirty="0">
                 <a:solidFill>
                   <a:srgbClr val="1A1F2B"/>
                 </a:solidFill>
@@ -4146,7 +4178,7 @@
             </a:r>
           </a:p>
           <a:p>
-            <a:pPr algn="l" marL="0" indent="0">
+            <a:pPr marL="0" indent="0" algn="l">
               <a:lnSpc>
                 <a:spcPct val="108000"/>
               </a:lnSpc>
@@ -4155,7 +4187,7 @@
               </a:spcAft>
             </a:pPr>
             <a:r>
-              <a:rPr sz="1550" b="1">
+              <a:rPr sz="1550" b="1" dirty="0">
                 <a:solidFill>
                   <a:srgbClr val="1F7A8C"/>
                 </a:solidFill>
@@ -4164,7 +4196,7 @@
               <a:t>▪  </a:t>
             </a:r>
             <a:r>
-              <a:rPr sz="1550" b="0" i="0">
+              <a:rPr sz="1550" b="0" i="0" dirty="0">
                 <a:solidFill>
                   <a:srgbClr val="1A1F2B"/>
                 </a:solidFill>
@@ -4184,7 +4216,7 @@
 </file>
 
 <file path=ppt/slides/slide11.xml><?xml version="1.0" encoding="utf-8"?>
-<p:sld xmlns:a="http://schemas.openxmlformats.org/drawingml/2006/main" xmlns:p="http://schemas.openxmlformats.org/presentationml/2006/main" xmlns:r="http://schemas.openxmlformats.org/officeDocument/2006/relationships">
+<p:sld xmlns:a="http://schemas.openxmlformats.org/drawingml/2006/main" xmlns:r="http://schemas.openxmlformats.org/officeDocument/2006/relationships" xmlns:p="http://schemas.openxmlformats.org/presentationml/2006/main">
   <p:cSld>
     <p:bg>
       <p:bgPr>
@@ -4200,7 +4232,14 @@
         <p:cNvGrpSpPr/>
         <p:nvPr/>
       </p:nvGrpSpPr>
-      <p:grpSpPr/>
+      <p:grpSpPr>
+        <a:xfrm>
+          <a:off x="0" y="0"/>
+          <a:ext cx="0" cy="0"/>
+          <a:chOff x="0" y="0"/>
+          <a:chExt cx="0" cy="0"/>
+        </a:xfrm>
+      </p:grpSpPr>
       <p:sp>
         <p:nvSpPr>
           <p:cNvPr id="2" name="Rectangle 1"/>
@@ -4242,6 +4281,7 @@
           <a:lstStyle/>
           <a:p>
             <a:pPr algn="ctr"/>
+            <a:endParaRPr/>
           </a:p>
         </p:txBody>
       </p:sp>
@@ -4262,7 +4302,7 @@
           <a:noFill/>
         </p:spPr>
         <p:txBody>
-          <a:bodyPr wrap="square" anchor="t" lIns="0" rIns="0" tIns="0" bIns="0">
+          <a:bodyPr wrap="square" lIns="0" tIns="0" rIns="0" bIns="0" anchor="t">
             <a:spAutoFit/>
           </a:bodyPr>
           <a:lstStyle/>
@@ -4301,7 +4341,7 @@
           <a:noFill/>
         </p:spPr>
         <p:txBody>
-          <a:bodyPr wrap="square" anchor="t" lIns="0" rIns="0" tIns="0" bIns="0">
+          <a:bodyPr wrap="square" lIns="0" tIns="0" rIns="0" bIns="0" anchor="t">
             <a:spAutoFit/>
           </a:bodyPr>
           <a:lstStyle/>
@@ -4364,6 +4404,7 @@
           <a:lstStyle/>
           <a:p>
             <a:pPr algn="ctr"/>
+            <a:endParaRPr/>
           </a:p>
         </p:txBody>
       </p:sp>
@@ -4384,12 +4425,12 @@
           <a:noFill/>
         </p:spPr>
         <p:txBody>
-          <a:bodyPr wrap="square" anchor="t" lIns="0" rIns="0" tIns="0" bIns="0">
+          <a:bodyPr wrap="square" lIns="0" tIns="0" rIns="0" bIns="0" anchor="t">
             <a:spAutoFit/>
           </a:bodyPr>
           <a:lstStyle/>
           <a:p>
-            <a:pPr algn="l" marL="0" indent="0">
+            <a:pPr marL="0" indent="0" algn="l">
               <a:lnSpc>
                 <a:spcPct val="108000"/>
               </a:lnSpc>
@@ -4435,7 +4476,7 @@
           <a:noFill/>
         </p:spPr>
         <p:txBody>
-          <a:bodyPr wrap="square" anchor="t" lIns="0" rIns="0" tIns="0" bIns="0">
+          <a:bodyPr wrap="square" lIns="0" tIns="0" rIns="0" bIns="0" anchor="t">
             <a:spAutoFit/>
           </a:bodyPr>
           <a:lstStyle/>
@@ -4466,7 +4507,7 @@
 </file>
 
 <file path=ppt/slides/slide2.xml><?xml version="1.0" encoding="utf-8"?>
-<p:sld xmlns:a="http://schemas.openxmlformats.org/drawingml/2006/main" xmlns:p="http://schemas.openxmlformats.org/presentationml/2006/main" xmlns:r="http://schemas.openxmlformats.org/officeDocument/2006/relationships">
+<p:sld xmlns:a="http://schemas.openxmlformats.org/drawingml/2006/main" xmlns:r="http://schemas.openxmlformats.org/officeDocument/2006/relationships" xmlns:p="http://schemas.openxmlformats.org/presentationml/2006/main">
   <p:cSld>
     <p:bg>
       <p:bgPr>
@@ -4482,7 +4523,14 @@
         <p:cNvGrpSpPr/>
         <p:nvPr/>
       </p:nvGrpSpPr>
-      <p:grpSpPr/>
+      <p:grpSpPr>
+        <a:xfrm>
+          <a:off x="0" y="0"/>
+          <a:ext cx="0" cy="0"/>
+          <a:chOff x="0" y="0"/>
+          <a:chExt cx="0" cy="0"/>
+        </a:xfrm>
+      </p:grpSpPr>
       <p:sp>
         <p:nvSpPr>
           <p:cNvPr id="2" name="Rectangle 1"/>
@@ -4524,6 +4572,7 @@
           <a:lstStyle/>
           <a:p>
             <a:pPr algn="ctr"/>
+            <a:endParaRPr/>
           </a:p>
         </p:txBody>
       </p:sp>
@@ -4568,6 +4617,7 @@
           <a:lstStyle/>
           <a:p>
             <a:pPr algn="ctr"/>
+            <a:endParaRPr/>
           </a:p>
         </p:txBody>
       </p:sp>
@@ -4588,7 +4638,7 @@
           <a:noFill/>
         </p:spPr>
         <p:txBody>
-          <a:bodyPr wrap="square" anchor="t" lIns="0" rIns="0" tIns="0" bIns="0">
+          <a:bodyPr wrap="square" lIns="0" tIns="0" rIns="0" bIns="0" anchor="t">
             <a:spAutoFit/>
           </a:bodyPr>
           <a:lstStyle/>
@@ -4627,7 +4677,7 @@
           <a:noFill/>
         </p:spPr>
         <p:txBody>
-          <a:bodyPr wrap="square" anchor="t" lIns="0" rIns="0" tIns="0" bIns="0">
+          <a:bodyPr wrap="square" lIns="0" tIns="0" rIns="0" bIns="0" anchor="t">
             <a:spAutoFit/>
           </a:bodyPr>
           <a:lstStyle/>
@@ -4666,7 +4716,7 @@
           <a:noFill/>
         </p:spPr>
         <p:txBody>
-          <a:bodyPr wrap="square" anchor="t" lIns="0" rIns="0" tIns="0" bIns="0">
+          <a:bodyPr wrap="square" lIns="0" tIns="0" rIns="0" bIns="0" anchor="t">
             <a:spAutoFit/>
           </a:bodyPr>
           <a:lstStyle/>
@@ -4705,7 +4755,7 @@
           <a:noFill/>
         </p:spPr>
         <p:txBody>
-          <a:bodyPr wrap="square" anchor="t" lIns="0" rIns="0" tIns="0" bIns="0">
+          <a:bodyPr wrap="square" lIns="0" tIns="0" rIns="0" bIns="0" anchor="t">
             <a:spAutoFit/>
           </a:bodyPr>
           <a:lstStyle/>
@@ -4744,7 +4794,7 @@
           <a:noFill/>
         </p:spPr>
         <p:txBody>
-          <a:bodyPr wrap="square" anchor="t" lIns="0" rIns="0" tIns="0" bIns="0">
+          <a:bodyPr wrap="square" lIns="0" tIns="0" rIns="0" bIns="0" anchor="t">
             <a:spAutoFit/>
           </a:bodyPr>
           <a:lstStyle/>
@@ -4783,7 +4833,7 @@
           <a:noFill/>
         </p:spPr>
         <p:txBody>
-          <a:bodyPr wrap="square" anchor="t" lIns="0" rIns="0" tIns="0" bIns="0">
+          <a:bodyPr wrap="square" lIns="0" tIns="0" rIns="0" bIns="0" anchor="t">
             <a:spAutoFit/>
           </a:bodyPr>
           <a:lstStyle/>
@@ -4846,6 +4896,7 @@
           <a:lstStyle/>
           <a:p>
             <a:pPr algn="ctr"/>
+            <a:endParaRPr/>
           </a:p>
         </p:txBody>
       </p:sp>
@@ -4890,6 +4941,7 @@
           <a:lstStyle/>
           <a:p>
             <a:pPr algn="ctr"/>
+            <a:endParaRPr/>
           </a:p>
         </p:txBody>
       </p:sp>
@@ -4934,6 +4986,7 @@
           <a:lstStyle/>
           <a:p>
             <a:pPr algn="ctr"/>
+            <a:endParaRPr/>
           </a:p>
         </p:txBody>
       </p:sp>
@@ -4978,6 +5031,7 @@
           <a:lstStyle/>
           <a:p>
             <a:pPr algn="ctr"/>
+            <a:endParaRPr/>
           </a:p>
         </p:txBody>
       </p:sp>
@@ -4998,7 +5052,7 @@
           <a:noFill/>
         </p:spPr>
         <p:txBody>
-          <a:bodyPr wrap="square" anchor="t" lIns="0" rIns="0" tIns="0" bIns="0">
+          <a:bodyPr wrap="square" lIns="0" tIns="0" rIns="0" bIns="0" anchor="t">
             <a:spAutoFit/>
           </a:bodyPr>
           <a:lstStyle/>
@@ -5037,7 +5091,7 @@
           <a:noFill/>
         </p:spPr>
         <p:txBody>
-          <a:bodyPr wrap="square" anchor="t" lIns="0" rIns="0" tIns="0" bIns="0">
+          <a:bodyPr wrap="square" lIns="0" tIns="0" rIns="0" bIns="0" anchor="t">
             <a:spAutoFit/>
           </a:bodyPr>
           <a:lstStyle/>
@@ -5068,7 +5122,7 @@
         <p:spPr>
           <a:xfrm>
             <a:off x="777240" y="3337560"/>
-            <a:ext cx="4892040" cy="2743200"/>
+            <a:ext cx="4892040" cy="2345129"/>
           </a:xfrm>
           <a:prstGeom prst="rect">
             <a:avLst/>
@@ -5076,12 +5130,12 @@
           <a:noFill/>
         </p:spPr>
         <p:txBody>
-          <a:bodyPr wrap="square" anchor="t" lIns="0" rIns="0" tIns="0" bIns="0">
+          <a:bodyPr wrap="square" lIns="0" tIns="0" rIns="0" bIns="0" anchor="t">
             <a:spAutoFit/>
           </a:bodyPr>
           <a:lstStyle/>
           <a:p>
-            <a:pPr algn="l" marL="0" indent="0">
+            <a:pPr marL="0" indent="0" algn="l">
               <a:lnSpc>
                 <a:spcPct val="108000"/>
               </a:lnSpc>
@@ -5090,7 +5144,7 @@
               </a:spcAft>
             </a:pPr>
             <a:r>
-              <a:rPr sz="1300" b="1">
+              <a:rPr sz="1300" b="1" dirty="0">
                 <a:solidFill>
                   <a:srgbClr val="1F7A8C"/>
                 </a:solidFill>
@@ -5099,17 +5153,35 @@
               <a:t>▪  </a:t>
             </a:r>
             <a:r>
-              <a:rPr sz="1300" b="0" i="0">
+              <a:rPr sz="1300" b="0" i="0" dirty="0">
                 <a:solidFill>
                   <a:srgbClr val="1A1F2B"/>
                 </a:solidFill>
                 <a:latin typeface="Calibri"/>
               </a:rPr>
-              <a:t>Baseline accuracy for NL → Python and Python → C++ generation using Qwen2.5-Coder-7B-Instruct</a:t>
-            </a:r>
-          </a:p>
-          <a:p>
-            <a:pPr algn="l" marL="0" indent="0">
+              <a:t>Baseline accuracy for NL → Python</a:t>
+            </a:r>
+            <a:r>
+              <a:rPr lang="en-US" sz="1300" b="0" i="0" dirty="0">
+                <a:solidFill>
+                  <a:srgbClr val="1A1F2B"/>
+                </a:solidFill>
+                <a:latin typeface="Calibri"/>
+              </a:rPr>
+              <a:t>/C++</a:t>
+            </a:r>
+            <a:r>
+              <a:rPr sz="1300" b="0" i="0" dirty="0">
+                <a:solidFill>
+                  <a:srgbClr val="1A1F2B"/>
+                </a:solidFill>
+                <a:latin typeface="Calibri"/>
+              </a:rPr>
+              <a:t> and Python → C++ generation using Qwen2.5-Coder-7B-Instruct</a:t>
+            </a:r>
+          </a:p>
+          <a:p>
+            <a:pPr marL="0" indent="0" algn="l">
               <a:lnSpc>
                 <a:spcPct val="108000"/>
               </a:lnSpc>
@@ -5118,7 +5190,7 @@
               </a:spcAft>
             </a:pPr>
             <a:r>
-              <a:rPr sz="1300" b="1">
+              <a:rPr sz="1300" b="1" dirty="0">
                 <a:solidFill>
                   <a:srgbClr val="1F7A8C"/>
                 </a:solidFill>
@@ -5127,17 +5199,68 @@
               <a:t>▪  </a:t>
             </a:r>
             <a:r>
-              <a:rPr sz="1300" b="0" i="0">
+              <a:rPr sz="1300" b="0" i="0" dirty="0" err="1">
                 <a:solidFill>
                   <a:srgbClr val="1A1F2B"/>
                 </a:solidFill>
                 <a:latin typeface="Calibri"/>
               </a:rPr>
-              <a:t>LoRA fine-tuning in two phases: NL → PL1 (Python) and PL1 → PL2 (Python ↔ C++ round-trip)</a:t>
-            </a:r>
-          </a:p>
-          <a:p>
-            <a:pPr algn="l" marL="0" indent="0">
+              <a:t>LoRA</a:t>
+            </a:r>
+            <a:r>
+              <a:rPr sz="1300" b="0" i="0" dirty="0">
+                <a:solidFill>
+                  <a:srgbClr val="1A1F2B"/>
+                </a:solidFill>
+                <a:latin typeface="Calibri"/>
+              </a:rPr>
+              <a:t> fine-tuning in two phases: NL → PL1 (Python</a:t>
+            </a:r>
+            <a:r>
+              <a:rPr lang="en-US" sz="1300" b="0" i="0" dirty="0">
+                <a:solidFill>
+                  <a:srgbClr val="1A1F2B"/>
+                </a:solidFill>
+                <a:latin typeface="Calibri"/>
+              </a:rPr>
+              <a:t>/C++</a:t>
+            </a:r>
+            <a:r>
+              <a:rPr sz="1300" b="0" i="0" dirty="0">
+                <a:solidFill>
+                  <a:srgbClr val="1A1F2B"/>
+                </a:solidFill>
+                <a:latin typeface="Calibri"/>
+              </a:rPr>
+              <a:t>) and PL1 → PL2 (Python  </a:t>
+            </a:r>
+            <a:r>
+              <a:rPr lang="en-US" sz="1300" b="0" i="0" dirty="0">
+                <a:solidFill>
+                  <a:srgbClr val="1A1F2B"/>
+                </a:solidFill>
+                <a:latin typeface="Calibri"/>
+              </a:rPr>
+              <a:t>-&gt; </a:t>
+            </a:r>
+            <a:r>
+              <a:rPr sz="1300" b="0" i="0" dirty="0">
+                <a:solidFill>
+                  <a:srgbClr val="1A1F2B"/>
+                </a:solidFill>
+                <a:latin typeface="Calibri"/>
+              </a:rPr>
+              <a:t>C++)</a:t>
+            </a:r>
+            <a:endParaRPr lang="en-US" sz="1300" b="0" i="0" dirty="0">
+              <a:solidFill>
+                <a:srgbClr val="1A1F2B"/>
+              </a:solidFill>
+              <a:latin typeface="Calibri"/>
+            </a:endParaRPr>
+          </a:p>
+          <a:p>
+            <a:pPr>
               <a:lnSpc>
                 <a:spcPct val="108000"/>
               </a:lnSpc>
@@ -5146,26 +5269,24 @@
               </a:spcAft>
             </a:pPr>
             <a:r>
-              <a:rPr sz="1300" b="1">
+              <a:rPr lang="en-US" sz="1300" b="1" dirty="0">
                 <a:solidFill>
                   <a:srgbClr val="1F7A8C"/>
                 </a:solidFill>
-                <a:latin typeface="Calibri"/>
               </a:rPr>
               <a:t>▪  </a:t>
             </a:r>
             <a:r>
-              <a:rPr sz="1300" b="0" i="0">
+              <a:rPr lang="en-US" sz="1300" dirty="0">
                 <a:solidFill>
                   <a:srgbClr val="1A1F2B"/>
                 </a:solidFill>
-                <a:latin typeface="Calibri"/>
-              </a:rPr>
-              <a:t>Best documentation selected from 3 generation iterations, scored per record</a:t>
-            </a:r>
-          </a:p>
-          <a:p>
-            <a:pPr algn="l" marL="0" indent="0">
+              </a:rPr>
+              <a:t>PL1-&gt; PL2. PL1-&gt; Documentation-&gt; PL2 Code -&gt; Translate to PL1 -&gt; Compare with ground truth PL1</a:t>
+            </a:r>
+          </a:p>
+          <a:p>
+            <a:pPr marL="0" indent="0" algn="l">
               <a:lnSpc>
                 <a:spcPct val="108000"/>
               </a:lnSpc>
@@ -5174,7 +5295,7 @@
               </a:spcAft>
             </a:pPr>
             <a:r>
-              <a:rPr sz="1300" b="1">
+              <a:rPr sz="1300" b="1" dirty="0">
                 <a:solidFill>
                   <a:srgbClr val="1F7A8C"/>
                 </a:solidFill>
@@ -5183,40 +5304,17 @@
               <a:t>▪  </a:t>
             </a:r>
             <a:r>
-              <a:rPr sz="1300" b="0" i="0">
+              <a:rPr sz="1300" b="0" i="0" dirty="0">
                 <a:solidFill>
                   <a:srgbClr val="1A1F2B"/>
                 </a:solidFill>
                 <a:latin typeface="Calibri"/>
               </a:rPr>
-              <a:t>Evaluation via AST similarity + GraphCodeBERTScore + LLM-as-judge</a:t>
-            </a:r>
-          </a:p>
-        </p:txBody>
-      </p:sp>
-      <p:sp>
-        <p:nvSpPr>
-          <p:cNvPr id="17" name="TextBox 16"/>
-          <p:cNvSpPr txBox="1"/>
-          <p:nvPr/>
-        </p:nvSpPr>
-        <p:spPr>
-          <a:xfrm>
-            <a:off x="6537960" y="3337560"/>
-            <a:ext cx="4892040" cy="2743200"/>
-          </a:xfrm>
-          <a:prstGeom prst="rect">
-            <a:avLst/>
-          </a:prstGeom>
-          <a:noFill/>
-        </p:spPr>
-        <p:txBody>
-          <a:bodyPr wrap="square" anchor="t" lIns="0" rIns="0" tIns="0" bIns="0">
-            <a:spAutoFit/>
-          </a:bodyPr>
-          <a:lstStyle/>
-          <a:p>
-            <a:pPr algn="l" marL="0" indent="0">
+              <a:t>Best documentation selected from 3 generation iterations, scored per record</a:t>
+            </a:r>
+          </a:p>
+          <a:p>
+            <a:pPr marL="0" indent="0" algn="l">
               <a:lnSpc>
                 <a:spcPct val="108000"/>
               </a:lnSpc>
@@ -5225,7 +5323,7 @@
               </a:spcAft>
             </a:pPr>
             <a:r>
-              <a:rPr sz="1300" b="1">
+              <a:rPr sz="1300" b="1" dirty="0">
                 <a:solidFill>
                   <a:srgbClr val="1F7A8C"/>
                 </a:solidFill>
@@ -5234,17 +5332,58 @@
               <a:t>▪  </a:t>
             </a:r>
             <a:r>
-              <a:rPr sz="1300" b="0" i="0">
+              <a:rPr sz="1300" b="0" i="0" dirty="0">
                 <a:solidFill>
                   <a:srgbClr val="1A1F2B"/>
                 </a:solidFill>
                 <a:latin typeface="Calibri"/>
               </a:rPr>
-              <a:t>ASR (Whisper) — speak a natural-language prompt → transcribed → code generated (NL → PL)</a:t>
-            </a:r>
-          </a:p>
-          <a:p>
-            <a:pPr algn="l" marL="0" indent="0">
+              <a:t>Evaluation via AST similarity + </a:t>
+            </a:r>
+            <a:r>
+              <a:rPr sz="1300" b="0" i="0" dirty="0" err="1">
+                <a:solidFill>
+                  <a:srgbClr val="1A1F2B"/>
+                </a:solidFill>
+                <a:latin typeface="Calibri"/>
+              </a:rPr>
+              <a:t>GraphCodeBERTScore</a:t>
+            </a:r>
+            <a:r>
+              <a:rPr sz="1300" b="0" i="0" dirty="0">
+                <a:solidFill>
+                  <a:srgbClr val="1A1F2B"/>
+                </a:solidFill>
+                <a:latin typeface="Calibri"/>
+              </a:rPr>
+              <a:t> + LLM-as-judge</a:t>
+            </a:r>
+          </a:p>
+        </p:txBody>
+      </p:sp>
+      <p:sp>
+        <p:nvSpPr>
+          <p:cNvPr id="17" name="TextBox 16"/>
+          <p:cNvSpPr txBox="1"/>
+          <p:nvPr/>
+        </p:nvSpPr>
+        <p:spPr>
+          <a:xfrm>
+            <a:off x="6537960" y="3337560"/>
+            <a:ext cx="4892040" cy="2743200"/>
+          </a:xfrm>
+          <a:prstGeom prst="rect">
+            <a:avLst/>
+          </a:prstGeom>
+          <a:noFill/>
+        </p:spPr>
+        <p:txBody>
+          <a:bodyPr wrap="square" lIns="0" tIns="0" rIns="0" bIns="0" anchor="t">
+            <a:spAutoFit/>
+          </a:bodyPr>
+          <a:lstStyle/>
+          <a:p>
+            <a:pPr marL="0" indent="0" algn="l">
               <a:lnSpc>
                 <a:spcPct val="108000"/>
               </a:lnSpc>
@@ -5268,11 +5407,11 @@
                 </a:solidFill>
                 <a:latin typeface="Calibri"/>
               </a:rPr>
-              <a:t>Text interface for PL → PL — paste Python, convert directly to C++</a:t>
-            </a:r>
-          </a:p>
-          <a:p>
-            <a:pPr algn="l" marL="0" indent="0">
+              <a:t>ASR (Whisper) — speak a natural-language prompt → transcribed → code generated (NL → PL)</a:t>
+            </a:r>
+          </a:p>
+          <a:p>
+            <a:pPr marL="0" indent="0" algn="l">
               <a:lnSpc>
                 <a:spcPct val="108000"/>
               </a:lnSpc>
@@ -5296,11 +5435,39 @@
                 </a:solidFill>
                 <a:latin typeface="Calibri"/>
               </a:rPr>
+              <a:t>Text interface for PL → PL — paste Python, convert directly to C++</a:t>
+            </a:r>
+          </a:p>
+          <a:p>
+            <a:pPr marL="0" indent="0" algn="l">
+              <a:lnSpc>
+                <a:spcPct val="108000"/>
+              </a:lnSpc>
+              <a:spcAft>
+                <a:spcPts val="800"/>
+              </a:spcAft>
+            </a:pPr>
+            <a:r>
+              <a:rPr sz="1300" b="1">
+                <a:solidFill>
+                  <a:srgbClr val="1F7A8C"/>
+                </a:solidFill>
+                <a:latin typeface="Calibri"/>
+              </a:rPr>
+              <a:t>▪  </a:t>
+            </a:r>
+            <a:r>
+              <a:rPr sz="1300" b="0" i="0">
+                <a:solidFill>
+                  <a:srgbClr val="1A1F2B"/>
+                </a:solidFill>
+                <a:latin typeface="Calibri"/>
+              </a:rPr>
               <a:t>Auto task-detection — LLM classifier routes input to the correct LoRA adapter</a:t>
             </a:r>
           </a:p>
           <a:p>
-            <a:pPr algn="l" marL="0" indent="0">
+            <a:pPr marL="0" indent="0" algn="l">
               <a:lnSpc>
                 <a:spcPct val="108000"/>
               </a:lnSpc>
@@ -5338,7 +5505,7 @@
 </file>
 
 <file path=ppt/slides/slide3.xml><?xml version="1.0" encoding="utf-8"?>
-<p:sld xmlns:a="http://schemas.openxmlformats.org/drawingml/2006/main" xmlns:p="http://schemas.openxmlformats.org/presentationml/2006/main" xmlns:r="http://schemas.openxmlformats.org/officeDocument/2006/relationships">
+<p:sld xmlns:a="http://schemas.openxmlformats.org/drawingml/2006/main" xmlns:r="http://schemas.openxmlformats.org/officeDocument/2006/relationships" xmlns:p="http://schemas.openxmlformats.org/presentationml/2006/main">
   <p:cSld>
     <p:bg>
       <p:bgPr>
@@ -5354,7 +5521,14 @@
         <p:cNvGrpSpPr/>
         <p:nvPr/>
       </p:nvGrpSpPr>
-      <p:grpSpPr/>
+      <p:grpSpPr>
+        <a:xfrm>
+          <a:off x="0" y="0"/>
+          <a:ext cx="0" cy="0"/>
+          <a:chOff x="0" y="0"/>
+          <a:chExt cx="0" cy="0"/>
+        </a:xfrm>
+      </p:grpSpPr>
       <p:sp>
         <p:nvSpPr>
           <p:cNvPr id="2" name="Rectangle 1"/>
@@ -5396,6 +5570,7 @@
           <a:lstStyle/>
           <a:p>
             <a:pPr algn="ctr"/>
+            <a:endParaRPr/>
           </a:p>
         </p:txBody>
       </p:sp>
@@ -5440,6 +5615,7 @@
           <a:lstStyle/>
           <a:p>
             <a:pPr algn="ctr"/>
+            <a:endParaRPr/>
           </a:p>
         </p:txBody>
       </p:sp>
@@ -5460,7 +5636,7 @@
           <a:noFill/>
         </p:spPr>
         <p:txBody>
-          <a:bodyPr wrap="square" anchor="t" lIns="0" rIns="0" tIns="0" bIns="0">
+          <a:bodyPr wrap="square" lIns="0" tIns="0" rIns="0" bIns="0" anchor="t">
             <a:spAutoFit/>
           </a:bodyPr>
           <a:lstStyle/>
@@ -5499,7 +5675,7 @@
           <a:noFill/>
         </p:spPr>
         <p:txBody>
-          <a:bodyPr wrap="square" anchor="t" lIns="0" rIns="0" tIns="0" bIns="0">
+          <a:bodyPr wrap="square" lIns="0" tIns="0" rIns="0" bIns="0" anchor="t">
             <a:spAutoFit/>
           </a:bodyPr>
           <a:lstStyle/>
@@ -5538,7 +5714,7 @@
           <a:noFill/>
         </p:spPr>
         <p:txBody>
-          <a:bodyPr wrap="square" anchor="t" lIns="0" rIns="0" tIns="0" bIns="0">
+          <a:bodyPr wrap="square" lIns="0" tIns="0" rIns="0" bIns="0" anchor="t">
             <a:spAutoFit/>
           </a:bodyPr>
           <a:lstStyle/>
@@ -5577,7 +5753,7 @@
           <a:noFill/>
         </p:spPr>
         <p:txBody>
-          <a:bodyPr wrap="square" anchor="t" lIns="0" rIns="0" tIns="0" bIns="0">
+          <a:bodyPr wrap="square" lIns="0" tIns="0" rIns="0" bIns="0" anchor="t">
             <a:spAutoFit/>
           </a:bodyPr>
           <a:lstStyle/>
@@ -5616,7 +5792,7 @@
           <a:noFill/>
         </p:spPr>
         <p:txBody>
-          <a:bodyPr wrap="square" anchor="t" lIns="0" rIns="0" tIns="0" bIns="0">
+          <a:bodyPr wrap="square" lIns="0" tIns="0" rIns="0" bIns="0" anchor="t">
             <a:spAutoFit/>
           </a:bodyPr>
           <a:lstStyle/>
@@ -5679,7 +5855,7 @@
           </a:fontRef>
         </p:style>
         <p:txBody>
-          <a:bodyPr rtlCol="0" anchor="ctr" wrap="square" lIns="76200" rIns="76200" tIns="50800" bIns="50800"/>
+          <a:bodyPr wrap="square" lIns="76200" tIns="50800" rIns="76200" bIns="50800" rtlCol="0" anchor="ctr"/>
           <a:lstStyle/>
           <a:p>
             <a:pPr algn="ctr"/>
@@ -5738,6 +5914,7 @@
           <a:lstStyle/>
           <a:p>
             <a:pPr algn="ctr"/>
+            <a:endParaRPr/>
           </a:p>
         </p:txBody>
       </p:sp>
@@ -5782,7 +5959,7 @@
           </a:fontRef>
         </p:style>
         <p:txBody>
-          <a:bodyPr rtlCol="0" anchor="ctr" wrap="square" lIns="76200" rIns="76200" tIns="50800" bIns="50800"/>
+          <a:bodyPr wrap="square" lIns="76200" tIns="50800" rIns="76200" bIns="50800" rtlCol="0" anchor="ctr"/>
           <a:lstStyle/>
           <a:p>
             <a:pPr algn="ctr"/>
@@ -5841,6 +6018,7 @@
           <a:lstStyle/>
           <a:p>
             <a:pPr algn="ctr"/>
+            <a:endParaRPr/>
           </a:p>
         </p:txBody>
       </p:sp>
@@ -5885,7 +6063,7 @@
           </a:fontRef>
         </p:style>
         <p:txBody>
-          <a:bodyPr rtlCol="0" anchor="ctr" wrap="square" lIns="76200" rIns="76200" tIns="50800" bIns="50800"/>
+          <a:bodyPr wrap="square" lIns="76200" tIns="50800" rIns="76200" bIns="50800" rtlCol="0" anchor="ctr"/>
           <a:lstStyle/>
           <a:p>
             <a:pPr algn="ctr"/>
@@ -5943,6 +6121,7 @@
           <a:lstStyle/>
           <a:p>
             <a:pPr algn="ctr"/>
+            <a:endParaRPr/>
           </a:p>
         </p:txBody>
       </p:sp>
@@ -5987,7 +6166,7 @@
           </a:fontRef>
         </p:style>
         <p:txBody>
-          <a:bodyPr rtlCol="0" anchor="ctr" wrap="square" lIns="76200" rIns="76200" tIns="50800" bIns="50800"/>
+          <a:bodyPr wrap="square" lIns="76200" tIns="50800" rIns="76200" bIns="50800" rtlCol="0" anchor="ctr"/>
           <a:lstStyle/>
           <a:p>
             <a:pPr algn="ctr"/>
@@ -6046,6 +6225,7 @@
           <a:lstStyle/>
           <a:p>
             <a:pPr algn="ctr"/>
+            <a:endParaRPr/>
           </a:p>
         </p:txBody>
       </p:sp>
@@ -6090,7 +6270,7 @@
           </a:fontRef>
         </p:style>
         <p:txBody>
-          <a:bodyPr rtlCol="0" anchor="ctr" wrap="square" lIns="76200" rIns="76200" tIns="50800" bIns="50800"/>
+          <a:bodyPr wrap="square" lIns="76200" tIns="50800" rIns="76200" bIns="50800" rtlCol="0" anchor="ctr"/>
           <a:lstStyle/>
           <a:p>
             <a:pPr algn="ctr"/>
@@ -6124,7 +6304,7 @@
           <a:noFill/>
         </p:spPr>
         <p:txBody>
-          <a:bodyPr wrap="square" anchor="t" lIns="0" rIns="0" tIns="0" bIns="0">
+          <a:bodyPr wrap="square" lIns="0" tIns="0" rIns="0" bIns="0" anchor="t">
             <a:spAutoFit/>
           </a:bodyPr>
           <a:lstStyle/>
@@ -6187,7 +6367,7 @@
           </a:fontRef>
         </p:style>
         <p:txBody>
-          <a:bodyPr rtlCol="0" anchor="ctr" wrap="square" lIns="76200" rIns="76200" tIns="50800" bIns="50800"/>
+          <a:bodyPr wrap="square" lIns="76200" tIns="50800" rIns="76200" bIns="50800" rtlCol="0" anchor="ctr"/>
           <a:lstStyle/>
           <a:p>
             <a:pPr algn="ctr"/>
@@ -6245,6 +6425,7 @@
           <a:lstStyle/>
           <a:p>
             <a:pPr algn="ctr"/>
+            <a:endParaRPr/>
           </a:p>
         </p:txBody>
       </p:sp>
@@ -6289,7 +6470,7 @@
           </a:fontRef>
         </p:style>
         <p:txBody>
-          <a:bodyPr rtlCol="0" anchor="ctr" wrap="square" lIns="76200" rIns="76200" tIns="50800" bIns="50800"/>
+          <a:bodyPr wrap="square" lIns="76200" tIns="50800" rIns="76200" bIns="50800" rtlCol="0" anchor="ctr"/>
           <a:lstStyle/>
           <a:p>
             <a:pPr algn="ctr"/>
@@ -6347,6 +6528,7 @@
           <a:lstStyle/>
           <a:p>
             <a:pPr algn="ctr"/>
+            <a:endParaRPr/>
           </a:p>
         </p:txBody>
       </p:sp>
@@ -6391,7 +6573,7 @@
           </a:fontRef>
         </p:style>
         <p:txBody>
-          <a:bodyPr rtlCol="0" anchor="ctr" wrap="square" lIns="76200" rIns="76200" tIns="50800" bIns="50800"/>
+          <a:bodyPr wrap="square" lIns="76200" tIns="50800" rIns="76200" bIns="50800" rtlCol="0" anchor="ctr"/>
           <a:lstStyle/>
           <a:p>
             <a:pPr algn="ctr"/>
@@ -6425,7 +6607,7 @@
           <a:noFill/>
         </p:spPr>
         <p:txBody>
-          <a:bodyPr wrap="square" anchor="t" lIns="0" rIns="0" tIns="0" bIns="0">
+          <a:bodyPr wrap="square" lIns="0" tIns="0" rIns="0" bIns="0" anchor="t">
             <a:spAutoFit/>
           </a:bodyPr>
           <a:lstStyle/>
@@ -6464,12 +6646,12 @@
           <a:noFill/>
         </p:spPr>
         <p:txBody>
-          <a:bodyPr wrap="square" anchor="t" lIns="0" rIns="0" tIns="0" bIns="0">
+          <a:bodyPr wrap="square" lIns="0" tIns="0" rIns="0" bIns="0" anchor="t">
             <a:spAutoFit/>
           </a:bodyPr>
           <a:lstStyle/>
           <a:p>
-            <a:pPr algn="l" marL="0" indent="0">
+            <a:pPr marL="0" indent="0" algn="l">
               <a:lnSpc>
                 <a:spcPct val="108000"/>
               </a:lnSpc>
@@ -6506,7 +6688,7 @@
             </a:r>
           </a:p>
           <a:p>
-            <a:pPr algn="l" marL="0" indent="0">
+            <a:pPr marL="0" indent="0" algn="l">
               <a:lnSpc>
                 <a:spcPct val="108000"/>
               </a:lnSpc>
@@ -6534,7 +6716,7 @@
             </a:r>
           </a:p>
           <a:p>
-            <a:pPr algn="l" marL="0" indent="0">
+            <a:pPr marL="0" indent="0" algn="l">
               <a:lnSpc>
                 <a:spcPct val="108000"/>
               </a:lnSpc>
@@ -6562,7 +6744,7 @@
             </a:r>
           </a:p>
           <a:p>
-            <a:pPr algn="l" marL="0" indent="0">
+            <a:pPr marL="0" indent="0" algn="l">
               <a:lnSpc>
                 <a:spcPct val="108000"/>
               </a:lnSpc>
@@ -6600,7 +6782,7 @@
 </file>
 
 <file path=ppt/slides/slide4.xml><?xml version="1.0" encoding="utf-8"?>
-<p:sld xmlns:a="http://schemas.openxmlformats.org/drawingml/2006/main" xmlns:p="http://schemas.openxmlformats.org/presentationml/2006/main" xmlns:r="http://schemas.openxmlformats.org/officeDocument/2006/relationships">
+<p:sld xmlns:a="http://schemas.openxmlformats.org/drawingml/2006/main" xmlns:r="http://schemas.openxmlformats.org/officeDocument/2006/relationships" xmlns:p="http://schemas.openxmlformats.org/presentationml/2006/main">
   <p:cSld>
     <p:bg>
       <p:bgPr>
@@ -6616,7 +6798,14 @@
         <p:cNvGrpSpPr/>
         <p:nvPr/>
       </p:nvGrpSpPr>
-      <p:grpSpPr/>
+      <p:grpSpPr>
+        <a:xfrm>
+          <a:off x="0" y="0"/>
+          <a:ext cx="0" cy="0"/>
+          <a:chOff x="0" y="0"/>
+          <a:chExt cx="0" cy="0"/>
+        </a:xfrm>
+      </p:grpSpPr>
       <p:sp>
         <p:nvSpPr>
           <p:cNvPr id="2" name="Rectangle 1"/>
@@ -6658,6 +6847,7 @@
           <a:lstStyle/>
           <a:p>
             <a:pPr algn="ctr"/>
+            <a:endParaRPr/>
           </a:p>
         </p:txBody>
       </p:sp>
@@ -6702,6 +6892,7 @@
           <a:lstStyle/>
           <a:p>
             <a:pPr algn="ctr"/>
+            <a:endParaRPr/>
           </a:p>
         </p:txBody>
       </p:sp>
@@ -6722,7 +6913,7 @@
           <a:noFill/>
         </p:spPr>
         <p:txBody>
-          <a:bodyPr wrap="square" anchor="t" lIns="0" rIns="0" tIns="0" bIns="0">
+          <a:bodyPr wrap="square" lIns="0" tIns="0" rIns="0" bIns="0" anchor="t">
             <a:spAutoFit/>
           </a:bodyPr>
           <a:lstStyle/>
@@ -6761,7 +6952,7 @@
           <a:noFill/>
         </p:spPr>
         <p:txBody>
-          <a:bodyPr wrap="square" anchor="t" lIns="0" rIns="0" tIns="0" bIns="0">
+          <a:bodyPr wrap="square" lIns="0" tIns="0" rIns="0" bIns="0" anchor="t">
             <a:spAutoFit/>
           </a:bodyPr>
           <a:lstStyle/>
@@ -6800,7 +6991,7 @@
           <a:noFill/>
         </p:spPr>
         <p:txBody>
-          <a:bodyPr wrap="square" anchor="t" lIns="0" rIns="0" tIns="0" bIns="0">
+          <a:bodyPr wrap="square" lIns="0" tIns="0" rIns="0" bIns="0" anchor="t">
             <a:spAutoFit/>
           </a:bodyPr>
           <a:lstStyle/>
@@ -6839,7 +7030,7 @@
           <a:noFill/>
         </p:spPr>
         <p:txBody>
-          <a:bodyPr wrap="square" anchor="t" lIns="0" rIns="0" tIns="0" bIns="0">
+          <a:bodyPr wrap="square" lIns="0" tIns="0" rIns="0" bIns="0" anchor="t">
             <a:spAutoFit/>
           </a:bodyPr>
           <a:lstStyle/>
@@ -6878,7 +7069,7 @@
           <a:noFill/>
         </p:spPr>
         <p:txBody>
-          <a:bodyPr wrap="square" anchor="t" lIns="0" rIns="0" tIns="0" bIns="0">
+          <a:bodyPr wrap="square" lIns="0" tIns="0" rIns="0" bIns="0" anchor="t">
             <a:spAutoFit/>
           </a:bodyPr>
           <a:lstStyle/>
@@ -6917,12 +7108,12 @@
           <a:noFill/>
         </p:spPr>
         <p:txBody>
-          <a:bodyPr wrap="square" anchor="t" lIns="0" rIns="0" tIns="0" bIns="0">
+          <a:bodyPr wrap="square" lIns="0" tIns="0" rIns="0" bIns="0" anchor="t">
             <a:spAutoFit/>
           </a:bodyPr>
           <a:lstStyle/>
           <a:p>
-            <a:pPr algn="l" marL="0" indent="0">
+            <a:pPr marL="0" indent="0" algn="l">
               <a:lnSpc>
                 <a:spcPct val="108000"/>
               </a:lnSpc>
@@ -6959,7 +7150,7 @@
             </a:r>
           </a:p>
           <a:p>
-            <a:pPr algn="l" marL="0" indent="0">
+            <a:pPr marL="0" indent="0" algn="l">
               <a:lnSpc>
                 <a:spcPct val="108000"/>
               </a:lnSpc>
@@ -6996,7 +7187,7 @@
             </a:r>
           </a:p>
           <a:p>
-            <a:pPr algn="l" marL="0" indent="0">
+            <a:pPr marL="0" indent="0" algn="l">
               <a:lnSpc>
                 <a:spcPct val="108000"/>
               </a:lnSpc>
@@ -7042,7 +7233,7 @@
           <a:noFill/>
         </p:spPr>
         <p:txBody>
-          <a:bodyPr wrap="square" anchor="t" lIns="0" rIns="0" tIns="0" bIns="0">
+          <a:bodyPr wrap="square" lIns="0" tIns="0" rIns="0" bIns="0" anchor="t">
             <a:spAutoFit/>
           </a:bodyPr>
           <a:lstStyle/>
@@ -7081,12 +7272,12 @@
           <a:noFill/>
         </p:spPr>
         <p:txBody>
-          <a:bodyPr wrap="square" anchor="t" lIns="0" rIns="0" tIns="0" bIns="0">
+          <a:bodyPr wrap="square" lIns="0" tIns="0" rIns="0" bIns="0" anchor="t">
             <a:spAutoFit/>
           </a:bodyPr>
           <a:lstStyle/>
           <a:p>
-            <a:pPr algn="l" marL="0" indent="0">
+            <a:pPr marL="0" indent="0" algn="l">
               <a:lnSpc>
                 <a:spcPct val="108000"/>
               </a:lnSpc>
@@ -7114,7 +7305,7 @@
             </a:r>
           </a:p>
           <a:p>
-            <a:pPr algn="l" marL="0" indent="0">
+            <a:pPr marL="0" indent="0" algn="l">
               <a:lnSpc>
                 <a:spcPct val="108000"/>
               </a:lnSpc>
@@ -7142,7 +7333,7 @@
             </a:r>
           </a:p>
           <a:p>
-            <a:pPr algn="l" marL="0" indent="0">
+            <a:pPr marL="0" indent="0" algn="l">
               <a:lnSpc>
                 <a:spcPct val="108000"/>
               </a:lnSpc>
@@ -7188,7 +7379,7 @@
           <a:noFill/>
         </p:spPr>
         <p:txBody>
-          <a:bodyPr wrap="square" anchor="t" lIns="0" rIns="0" tIns="0" bIns="0">
+          <a:bodyPr wrap="square" lIns="0" tIns="0" rIns="0" bIns="0" anchor="t">
             <a:spAutoFit/>
           </a:bodyPr>
           <a:lstStyle/>
@@ -7229,9 +7420,27 @@
                 <a:tableStyleId>{5C22544A-7EE6-4342-B048-85BDC9FD1C3A}</a:tableStyleId>
               </a:tblPr>
               <a:tblGrid>
-                <a:gridCol w="1472184"/>
-                <a:gridCol w="736092"/>
-                <a:gridCol w="3049524"/>
+                <a:gridCol w="1472184">
+                  <a:extLst>
+                    <a:ext uri="{9D8B030D-6E8A-4147-A177-3AD203B41FA5}">
+                      <a16:colId xmlns:a16="http://schemas.microsoft.com/office/drawing/2014/main" val="20000"/>
+                    </a:ext>
+                  </a:extLst>
+                </a:gridCol>
+                <a:gridCol w="736092">
+                  <a:extLst>
+                    <a:ext uri="{9D8B030D-6E8A-4147-A177-3AD203B41FA5}">
+                      <a16:colId xmlns:a16="http://schemas.microsoft.com/office/drawing/2014/main" val="20001"/>
+                    </a:ext>
+                  </a:extLst>
+                </a:gridCol>
+                <a:gridCol w="3049524">
+                  <a:extLst>
+                    <a:ext uri="{9D8B030D-6E8A-4147-A177-3AD203B41FA5}">
+                      <a16:colId xmlns:a16="http://schemas.microsoft.com/office/drawing/2014/main" val="20002"/>
+                    </a:ext>
+                  </a:extLst>
+                </a:gridCol>
               </a:tblGrid>
               <a:tr h="388620">
                 <a:tc>
@@ -7241,7 +7450,7 @@
                     <a:p>
                       <a:pPr algn="l"/>
                       <a:r>
-                        <a:rPr b="1" sz="1250">
+                        <a:rPr sz="1250" b="1">
                           <a:solidFill>
                             <a:srgbClr val="FFFFFF"/>
                           </a:solidFill>
@@ -7264,7 +7473,7 @@
                     <a:p>
                       <a:pPr algn="l"/>
                       <a:r>
-                        <a:rPr b="1" sz="1250">
+                        <a:rPr sz="1250" b="1">
                           <a:solidFill>
                             <a:srgbClr val="FFFFFF"/>
                           </a:solidFill>
@@ -7287,7 +7496,7 @@
                     <a:p>
                       <a:pPr algn="l"/>
                       <a:r>
-                        <a:rPr b="1" sz="1250">
+                        <a:rPr sz="1250" b="1">
                           <a:solidFill>
                             <a:srgbClr val="FFFFFF"/>
                           </a:solidFill>
@@ -7303,6 +7512,11 @@
                     </a:solidFill>
                   </a:tcPr>
                 </a:tc>
+                <a:extLst>
+                  <a:ext uri="{0D108BD9-81ED-4DB2-BD59-A6C34878D82A}">
+                    <a16:rowId xmlns:a16="http://schemas.microsoft.com/office/drawing/2014/main" val="10000"/>
+                  </a:ext>
+                </a:extLst>
               </a:tr>
               <a:tr h="388620">
                 <a:tc>
@@ -7371,6 +7585,11 @@
                     </a:solidFill>
                   </a:tcPr>
                 </a:tc>
+                <a:extLst>
+                  <a:ext uri="{0D108BD9-81ED-4DB2-BD59-A6C34878D82A}">
+                    <a16:rowId xmlns:a16="http://schemas.microsoft.com/office/drawing/2014/main" val="10001"/>
+                  </a:ext>
+                </a:extLst>
               </a:tr>
               <a:tr h="388620">
                 <a:tc>
@@ -7439,6 +7658,11 @@
                     </a:solidFill>
                   </a:tcPr>
                 </a:tc>
+                <a:extLst>
+                  <a:ext uri="{0D108BD9-81ED-4DB2-BD59-A6C34878D82A}">
+                    <a16:rowId xmlns:a16="http://schemas.microsoft.com/office/drawing/2014/main" val="10002"/>
+                  </a:ext>
+                </a:extLst>
               </a:tr>
               <a:tr h="388620">
                 <a:tc>
@@ -7507,6 +7731,11 @@
                     </a:solidFill>
                   </a:tcPr>
                 </a:tc>
+                <a:extLst>
+                  <a:ext uri="{0D108BD9-81ED-4DB2-BD59-A6C34878D82A}">
+                    <a16:rowId xmlns:a16="http://schemas.microsoft.com/office/drawing/2014/main" val="10003"/>
+                  </a:ext>
+                </a:extLst>
               </a:tr>
             </a:tbl>
           </a:graphicData>
@@ -7529,7 +7758,7 @@
           <a:noFill/>
         </p:spPr>
         <p:txBody>
-          <a:bodyPr wrap="square" anchor="t" lIns="0" rIns="0" tIns="0" bIns="0">
+          <a:bodyPr wrap="square" lIns="0" tIns="0" rIns="0" bIns="0" anchor="t">
             <a:spAutoFit/>
           </a:bodyPr>
           <a:lstStyle/>
@@ -7568,12 +7797,12 @@
           <a:noFill/>
         </p:spPr>
         <p:txBody>
-          <a:bodyPr wrap="square" anchor="t" lIns="0" rIns="0" tIns="0" bIns="0">
+          <a:bodyPr wrap="square" lIns="0" tIns="0" rIns="0" bIns="0" anchor="t">
             <a:spAutoFit/>
           </a:bodyPr>
           <a:lstStyle/>
           <a:p>
-            <a:pPr algn="l" marL="0" indent="0">
+            <a:pPr marL="0" indent="0" algn="l">
               <a:lnSpc>
                 <a:spcPct val="108000"/>
               </a:lnSpc>
@@ -7610,7 +7839,7 @@
             </a:r>
           </a:p>
           <a:p>
-            <a:pPr algn="l" marL="0" indent="0">
+            <a:pPr marL="0" indent="0" algn="l">
               <a:lnSpc>
                 <a:spcPct val="108000"/>
               </a:lnSpc>
@@ -7647,7 +7876,7 @@
             </a:r>
           </a:p>
           <a:p>
-            <a:pPr algn="l" marL="0" indent="0">
+            <a:pPr marL="0" indent="0" algn="l">
               <a:lnSpc>
                 <a:spcPct val="108000"/>
               </a:lnSpc>
@@ -7685,7 +7914,7 @@
 </file>
 
 <file path=ppt/slides/slide5.xml><?xml version="1.0" encoding="utf-8"?>
-<p:sld xmlns:a="http://schemas.openxmlformats.org/drawingml/2006/main" xmlns:p="http://schemas.openxmlformats.org/presentationml/2006/main" xmlns:r="http://schemas.openxmlformats.org/officeDocument/2006/relationships">
+<p:sld xmlns:a="http://schemas.openxmlformats.org/drawingml/2006/main" xmlns:r="http://schemas.openxmlformats.org/officeDocument/2006/relationships" xmlns:p="http://schemas.openxmlformats.org/presentationml/2006/main">
   <p:cSld>
     <p:bg>
       <p:bgPr>
@@ -7701,7 +7930,14 @@
         <p:cNvGrpSpPr/>
         <p:nvPr/>
       </p:nvGrpSpPr>
-      <p:grpSpPr/>
+      <p:grpSpPr>
+        <a:xfrm>
+          <a:off x="0" y="0"/>
+          <a:ext cx="0" cy="0"/>
+          <a:chOff x="0" y="0"/>
+          <a:chExt cx="0" cy="0"/>
+        </a:xfrm>
+      </p:grpSpPr>
       <p:sp>
         <p:nvSpPr>
           <p:cNvPr id="2" name="Rectangle 1"/>
@@ -7743,6 +7979,7 @@
           <a:lstStyle/>
           <a:p>
             <a:pPr algn="ctr"/>
+            <a:endParaRPr/>
           </a:p>
         </p:txBody>
       </p:sp>
@@ -7787,6 +8024,7 @@
           <a:lstStyle/>
           <a:p>
             <a:pPr algn="ctr"/>
+            <a:endParaRPr/>
           </a:p>
         </p:txBody>
       </p:sp>
@@ -7807,7 +8045,7 @@
           <a:noFill/>
         </p:spPr>
         <p:txBody>
-          <a:bodyPr wrap="square" anchor="t" lIns="0" rIns="0" tIns="0" bIns="0">
+          <a:bodyPr wrap="square" lIns="0" tIns="0" rIns="0" bIns="0" anchor="t">
             <a:spAutoFit/>
           </a:bodyPr>
           <a:lstStyle/>
@@ -7846,7 +8084,7 @@
           <a:noFill/>
         </p:spPr>
         <p:txBody>
-          <a:bodyPr wrap="square" anchor="t" lIns="0" rIns="0" tIns="0" bIns="0">
+          <a:bodyPr wrap="square" lIns="0" tIns="0" rIns="0" bIns="0" anchor="t">
             <a:spAutoFit/>
           </a:bodyPr>
           <a:lstStyle/>
@@ -7885,7 +8123,7 @@
           <a:noFill/>
         </p:spPr>
         <p:txBody>
-          <a:bodyPr wrap="square" anchor="t" lIns="0" rIns="0" tIns="0" bIns="0">
+          <a:bodyPr wrap="square" lIns="0" tIns="0" rIns="0" bIns="0" anchor="t">
             <a:spAutoFit/>
           </a:bodyPr>
           <a:lstStyle/>
@@ -7924,7 +8162,7 @@
           <a:noFill/>
         </p:spPr>
         <p:txBody>
-          <a:bodyPr wrap="square" anchor="t" lIns="0" rIns="0" tIns="0" bIns="0">
+          <a:bodyPr wrap="square" lIns="0" tIns="0" rIns="0" bIns="0" anchor="t">
             <a:spAutoFit/>
           </a:bodyPr>
           <a:lstStyle/>
@@ -7952,11 +8190,17 @@
           <p:cNvGraphicFramePr>
             <a:graphicFrameLocks noGrp="1"/>
           </p:cNvGraphicFramePr>
-          <p:nvPr/>
+          <p:nvPr>
+            <p:extLst>
+              <p:ext uri="{D42A27DB-BD31-4B8C-83A1-F6EECF244321}">
+                <p14:modId xmlns:p14="http://schemas.microsoft.com/office/powerpoint/2010/main" val="4208741260"/>
+              </p:ext>
+            </p:extLst>
+          </p:nvPr>
         </p:nvGraphicFramePr>
         <p:xfrm>
           <a:off x="502920" y="1325880"/>
-          <a:ext cx="11201400" cy="2788920"/>
+          <a:ext cx="11201400" cy="2796540"/>
         </p:xfrm>
         <a:graphic>
           <a:graphicData uri="http://schemas.openxmlformats.org/drawingml/2006/table">
@@ -7965,9 +8209,27 @@
                 <a:tableStyleId>{5C22544A-7EE6-4342-B048-85BDC9FD1C3A}</a:tableStyleId>
               </a:tblPr>
               <a:tblGrid>
-                <a:gridCol w="2464308"/>
-                <a:gridCol w="4256532"/>
-                <a:gridCol w="4480560"/>
+                <a:gridCol w="2464308">
+                  <a:extLst>
+                    <a:ext uri="{9D8B030D-6E8A-4147-A177-3AD203B41FA5}">
+                      <a16:colId xmlns:a16="http://schemas.microsoft.com/office/drawing/2014/main" val="20000"/>
+                    </a:ext>
+                  </a:extLst>
+                </a:gridCol>
+                <a:gridCol w="4256532">
+                  <a:extLst>
+                    <a:ext uri="{9D8B030D-6E8A-4147-A177-3AD203B41FA5}">
+                      <a16:colId xmlns:a16="http://schemas.microsoft.com/office/drawing/2014/main" val="20001"/>
+                    </a:ext>
+                  </a:extLst>
+                </a:gridCol>
+                <a:gridCol w="4480560">
+                  <a:extLst>
+                    <a:ext uri="{9D8B030D-6E8A-4147-A177-3AD203B41FA5}">
+                      <a16:colId xmlns:a16="http://schemas.microsoft.com/office/drawing/2014/main" val="20002"/>
+                    </a:ext>
+                  </a:extLst>
+                </a:gridCol>
               </a:tblGrid>
               <a:tr h="464820">
                 <a:tc>
@@ -7977,7 +8239,7 @@
                     <a:p>
                       <a:pPr algn="l"/>
                       <a:r>
-                        <a:rPr b="1" sz="1300">
+                        <a:rPr sz="1300" b="1">
                           <a:solidFill>
                             <a:srgbClr val="FFFFFF"/>
                           </a:solidFill>
@@ -8000,7 +8262,7 @@
                     <a:p>
                       <a:pPr algn="l"/>
                       <a:r>
-                        <a:rPr b="1" sz="1300">
+                        <a:rPr sz="1300" b="1">
                           <a:solidFill>
                             <a:srgbClr val="FFFFFF"/>
                           </a:solidFill>
@@ -8023,7 +8285,7 @@
                     <a:p>
                       <a:pPr algn="l"/>
                       <a:r>
-                        <a:rPr b="1" sz="1300">
+                        <a:rPr sz="1300" b="1">
                           <a:solidFill>
                             <a:srgbClr val="FFFFFF"/>
                           </a:solidFill>
@@ -8039,6 +8301,11 @@
                     </a:solidFill>
                   </a:tcPr>
                 </a:tc>
+                <a:extLst>
+                  <a:ext uri="{0D108BD9-81ED-4DB2-BD59-A6C34878D82A}">
+                    <a16:rowId xmlns:a16="http://schemas.microsoft.com/office/drawing/2014/main" val="10000"/>
+                  </a:ext>
+                </a:extLst>
               </a:tr>
               <a:tr h="464820">
                 <a:tc>
@@ -8107,6 +8374,11 @@
                     </a:solidFill>
                   </a:tcPr>
                 </a:tc>
+                <a:extLst>
+                  <a:ext uri="{0D108BD9-81ED-4DB2-BD59-A6C34878D82A}">
+                    <a16:rowId xmlns:a16="http://schemas.microsoft.com/office/drawing/2014/main" val="10001"/>
+                  </a:ext>
+                </a:extLst>
               </a:tr>
               <a:tr h="464820">
                 <a:tc>
@@ -8159,13 +8431,58 @@
                     <a:lstStyle/>
                     <a:p>
                       <a:r>
-                        <a:rPr sz="1250">
+                        <a:rPr sz="1250" dirty="0">
                           <a:solidFill>
                             <a:srgbClr val="1A1F2B"/>
                           </a:solidFill>
                           <a:latin typeface="Calibri"/>
                         </a:rPr>
-                        <a:t>Two adapters: NL→Python, Python→C++</a:t>
+                        <a:t>Two adapters: </a:t>
+                      </a:r>
+                      <a:r>
+                        <a:rPr sz="1250" dirty="0" err="1">
+                          <a:solidFill>
+                            <a:srgbClr val="1A1F2B"/>
+                          </a:solidFill>
+                          <a:latin typeface="Calibri"/>
+                        </a:rPr>
+                        <a:t>NL→Python</a:t>
+                      </a:r>
+                      <a:r>
+                        <a:rPr lang="en-US" sz="1250" dirty="0">
+                          <a:solidFill>
+                            <a:srgbClr val="1A1F2B"/>
+                          </a:solidFill>
+                          <a:latin typeface="Calibri"/>
+                        </a:rPr>
+                        <a:t>/C++</a:t>
+                      </a:r>
+                      <a:r>
+                        <a:rPr sz="1250" dirty="0">
+                          <a:solidFill>
+                            <a:srgbClr val="1A1F2B"/>
+                          </a:solidFill>
+                          <a:latin typeface="Calibri"/>
+                        </a:rPr>
+                        <a:t>, </a:t>
+                      </a:r>
+                      <a:r>
+                        <a:rPr sz="1250" dirty="0" err="1">
+                          <a:solidFill>
+                            <a:srgbClr val="1A1F2B"/>
+                          </a:solidFill>
+                          <a:latin typeface="Calibri"/>
+                        </a:rPr>
+                        <a:t>Python→C</a:t>
+                      </a:r>
+                      <a:r>
+                        <a:rPr sz="1250" dirty="0">
+                          <a:solidFill>
+                            <a:srgbClr val="1A1F2B"/>
+                          </a:solidFill>
+                          <a:latin typeface="Calibri"/>
+                        </a:rPr>
+                        <a:t>++</a:t>
                       </a:r>
                     </a:p>
                   </a:txBody>
@@ -8175,6 +8492,11 @@
                     </a:solidFill>
                   </a:tcPr>
                 </a:tc>
+                <a:extLst>
+                  <a:ext uri="{0D108BD9-81ED-4DB2-BD59-A6C34878D82A}">
+                    <a16:rowId xmlns:a16="http://schemas.microsoft.com/office/drawing/2014/main" val="10002"/>
+                  </a:ext>
+                </a:extLst>
               </a:tr>
               <a:tr h="464820">
                 <a:tc>
@@ -8254,6 +8576,11 @@
                     </a:solidFill>
                   </a:tcPr>
                 </a:tc>
+                <a:extLst>
+                  <a:ext uri="{0D108BD9-81ED-4DB2-BD59-A6C34878D82A}">
+                    <a16:rowId xmlns:a16="http://schemas.microsoft.com/office/drawing/2014/main" val="10003"/>
+                  </a:ext>
+                </a:extLst>
               </a:tr>
               <a:tr h="464820">
                 <a:tc>
@@ -8322,6 +8649,11 @@
                     </a:solidFill>
                   </a:tcPr>
                 </a:tc>
+                <a:extLst>
+                  <a:ext uri="{0D108BD9-81ED-4DB2-BD59-A6C34878D82A}">
+                    <a16:rowId xmlns:a16="http://schemas.microsoft.com/office/drawing/2014/main" val="10004"/>
+                  </a:ext>
+                </a:extLst>
               </a:tr>
               <a:tr h="464820">
                 <a:tc>
@@ -8374,7 +8706,7 @@
                     <a:lstStyle/>
                     <a:p>
                       <a:r>
-                        <a:rPr sz="1250">
+                        <a:rPr sz="1250" dirty="0">
                           <a:solidFill>
                             <a:srgbClr val="1A1F2B"/>
                           </a:solidFill>
@@ -8390,6 +8722,11 @@
                     </a:solidFill>
                   </a:tcPr>
                 </a:tc>
+                <a:extLst>
+                  <a:ext uri="{0D108BD9-81ED-4DB2-BD59-A6C34878D82A}">
+                    <a16:rowId xmlns:a16="http://schemas.microsoft.com/office/drawing/2014/main" val="10005"/>
+                  </a:ext>
+                </a:extLst>
               </a:tr>
             </a:tbl>
           </a:graphicData>
@@ -8412,7 +8749,7 @@
           <a:noFill/>
         </p:spPr>
         <p:txBody>
-          <a:bodyPr wrap="square" anchor="t" lIns="0" rIns="0" tIns="0" bIns="0">
+          <a:bodyPr wrap="square" lIns="0" tIns="0" rIns="0" bIns="0" anchor="t">
             <a:spAutoFit/>
           </a:bodyPr>
           <a:lstStyle/>
@@ -8451,12 +8788,12 @@
           <a:noFill/>
         </p:spPr>
         <p:txBody>
-          <a:bodyPr wrap="square" anchor="t" lIns="0" rIns="0" tIns="0" bIns="0">
+          <a:bodyPr wrap="square" lIns="0" tIns="0" rIns="0" bIns="0" anchor="t">
             <a:spAutoFit/>
           </a:bodyPr>
           <a:lstStyle/>
           <a:p>
-            <a:pPr algn="l" marL="0" indent="0">
+            <a:pPr marL="0" indent="0" algn="l">
               <a:lnSpc>
                 <a:spcPct val="108000"/>
               </a:lnSpc>
@@ -8493,7 +8830,7 @@
             </a:r>
           </a:p>
           <a:p>
-            <a:pPr algn="l" marL="0" indent="0">
+            <a:pPr marL="0" indent="0" algn="l">
               <a:lnSpc>
                 <a:spcPct val="108000"/>
               </a:lnSpc>
@@ -8521,7 +8858,7 @@
             </a:r>
           </a:p>
           <a:p>
-            <a:pPr algn="l" marL="0" indent="0">
+            <a:pPr marL="0" indent="0" algn="l">
               <a:lnSpc>
                 <a:spcPct val="108000"/>
               </a:lnSpc>
@@ -8558,7 +8895,7 @@
             </a:r>
           </a:p>
           <a:p>
-            <a:pPr algn="l" marL="0" indent="0">
+            <a:pPr marL="0" indent="0" algn="l">
               <a:lnSpc>
                 <a:spcPct val="108000"/>
               </a:lnSpc>
@@ -8586,7 +8923,7 @@
             </a:r>
           </a:p>
           <a:p>
-            <a:pPr algn="l" marL="0" indent="0">
+            <a:pPr marL="0" indent="0" algn="l">
               <a:lnSpc>
                 <a:spcPct val="108000"/>
               </a:lnSpc>
@@ -8624,7 +8961,7 @@
 </file>
 
 <file path=ppt/slides/slide6.xml><?xml version="1.0" encoding="utf-8"?>
-<p:sld xmlns:a="http://schemas.openxmlformats.org/drawingml/2006/main" xmlns:p="http://schemas.openxmlformats.org/presentationml/2006/main" xmlns:r="http://schemas.openxmlformats.org/officeDocument/2006/relationships">
+<p:sld xmlns:a="http://schemas.openxmlformats.org/drawingml/2006/main" xmlns:r="http://schemas.openxmlformats.org/officeDocument/2006/relationships" xmlns:p="http://schemas.openxmlformats.org/presentationml/2006/main">
   <p:cSld>
     <p:bg>
       <p:bgPr>
@@ -8640,7 +8977,14 @@
         <p:cNvGrpSpPr/>
         <p:nvPr/>
       </p:nvGrpSpPr>
-      <p:grpSpPr/>
+      <p:grpSpPr>
+        <a:xfrm>
+          <a:off x="0" y="0"/>
+          <a:ext cx="0" cy="0"/>
+          <a:chOff x="0" y="0"/>
+          <a:chExt cx="0" cy="0"/>
+        </a:xfrm>
+      </p:grpSpPr>
       <p:sp>
         <p:nvSpPr>
           <p:cNvPr id="2" name="Rectangle 1"/>
@@ -8682,6 +9026,7 @@
           <a:lstStyle/>
           <a:p>
             <a:pPr algn="ctr"/>
+            <a:endParaRPr/>
           </a:p>
         </p:txBody>
       </p:sp>
@@ -8726,6 +9071,7 @@
           <a:lstStyle/>
           <a:p>
             <a:pPr algn="ctr"/>
+            <a:endParaRPr/>
           </a:p>
         </p:txBody>
       </p:sp>
@@ -8746,7 +9092,7 @@
           <a:noFill/>
         </p:spPr>
         <p:txBody>
-          <a:bodyPr wrap="square" anchor="t" lIns="0" rIns="0" tIns="0" bIns="0">
+          <a:bodyPr wrap="square" lIns="0" tIns="0" rIns="0" bIns="0" anchor="t">
             <a:spAutoFit/>
           </a:bodyPr>
           <a:lstStyle/>
@@ -8785,7 +9131,7 @@
           <a:noFill/>
         </p:spPr>
         <p:txBody>
-          <a:bodyPr wrap="square" anchor="t" lIns="0" rIns="0" tIns="0" bIns="0">
+          <a:bodyPr wrap="square" lIns="0" tIns="0" rIns="0" bIns="0" anchor="t">
             <a:spAutoFit/>
           </a:bodyPr>
           <a:lstStyle/>
@@ -8824,7 +9170,7 @@
           <a:noFill/>
         </p:spPr>
         <p:txBody>
-          <a:bodyPr wrap="square" anchor="t" lIns="0" rIns="0" tIns="0" bIns="0">
+          <a:bodyPr wrap="square" lIns="0" tIns="0" rIns="0" bIns="0" anchor="t">
             <a:spAutoFit/>
           </a:bodyPr>
           <a:lstStyle/>
@@ -8863,7 +9209,7 @@
           <a:noFill/>
         </p:spPr>
         <p:txBody>
-          <a:bodyPr wrap="square" anchor="t" lIns="0" rIns="0" tIns="0" bIns="0">
+          <a:bodyPr wrap="square" lIns="0" tIns="0" rIns="0" bIns="0" anchor="t">
             <a:spAutoFit/>
           </a:bodyPr>
           <a:lstStyle/>
@@ -8902,7 +9248,7 @@
           <a:noFill/>
         </p:spPr>
         <p:txBody>
-          <a:bodyPr wrap="square" anchor="t" lIns="0" rIns="0" tIns="0" bIns="0">
+          <a:bodyPr wrap="square" lIns="0" tIns="0" rIns="0" bIns="0" anchor="t">
             <a:spAutoFit/>
           </a:bodyPr>
           <a:lstStyle/>
@@ -8965,7 +9311,7 @@
           </a:fontRef>
         </p:style>
         <p:txBody>
-          <a:bodyPr rtlCol="0" anchor="ctr" wrap="square" lIns="76200" rIns="76200" tIns="50800" bIns="50800"/>
+          <a:bodyPr wrap="square" lIns="76200" tIns="50800" rIns="76200" bIns="50800" rtlCol="0" anchor="ctr"/>
           <a:lstStyle/>
           <a:p>
             <a:pPr algn="ctr"/>
@@ -9023,6 +9369,7 @@
           <a:lstStyle/>
           <a:p>
             <a:pPr algn="ctr"/>
+            <a:endParaRPr/>
           </a:p>
         </p:txBody>
       </p:sp>
@@ -9067,7 +9414,7 @@
           </a:fontRef>
         </p:style>
         <p:txBody>
-          <a:bodyPr rtlCol="0" anchor="ctr" wrap="square" lIns="76200" rIns="76200" tIns="50800" bIns="50800"/>
+          <a:bodyPr wrap="square" lIns="76200" tIns="50800" rIns="76200" bIns="50800" rtlCol="0" anchor="ctr"/>
           <a:lstStyle/>
           <a:p>
             <a:pPr algn="ctr"/>
@@ -9125,6 +9472,7 @@
           <a:lstStyle/>
           <a:p>
             <a:pPr algn="ctr"/>
+            <a:endParaRPr/>
           </a:p>
         </p:txBody>
       </p:sp>
@@ -9169,7 +9517,7 @@
           </a:fontRef>
         </p:style>
         <p:txBody>
-          <a:bodyPr rtlCol="0" anchor="ctr" wrap="square" lIns="76200" rIns="76200" tIns="50800" bIns="50800"/>
+          <a:bodyPr wrap="square" lIns="76200" tIns="50800" rIns="76200" bIns="50800" rtlCol="0" anchor="ctr"/>
           <a:lstStyle/>
           <a:p>
             <a:pPr algn="ctr"/>
@@ -9227,6 +9575,7 @@
           <a:lstStyle/>
           <a:p>
             <a:pPr algn="ctr"/>
+            <a:endParaRPr/>
           </a:p>
         </p:txBody>
       </p:sp>
@@ -9271,7 +9620,7 @@
           </a:fontRef>
         </p:style>
         <p:txBody>
-          <a:bodyPr rtlCol="0" anchor="ctr" wrap="square" lIns="76200" rIns="76200" tIns="50800" bIns="50800"/>
+          <a:bodyPr wrap="square" lIns="76200" tIns="50800" rIns="76200" bIns="50800" rtlCol="0" anchor="ctr"/>
           <a:lstStyle/>
           <a:p>
             <a:pPr algn="ctr"/>
@@ -9329,6 +9678,7 @@
           <a:lstStyle/>
           <a:p>
             <a:pPr algn="ctr"/>
+            <a:endParaRPr/>
           </a:p>
         </p:txBody>
       </p:sp>
@@ -9373,7 +9723,7 @@
           </a:fontRef>
         </p:style>
         <p:txBody>
-          <a:bodyPr rtlCol="0" anchor="ctr" wrap="square" lIns="76200" rIns="76200" tIns="50800" bIns="50800"/>
+          <a:bodyPr wrap="square" lIns="76200" tIns="50800" rIns="76200" bIns="50800" rtlCol="0" anchor="ctr"/>
           <a:lstStyle/>
           <a:p>
             <a:pPr algn="ctr"/>
@@ -9407,7 +9757,7 @@
           <a:noFill/>
         </p:spPr>
         <p:txBody>
-          <a:bodyPr wrap="square" anchor="t" lIns="0" rIns="0" tIns="0" bIns="0">
+          <a:bodyPr wrap="square" lIns="0" tIns="0" rIns="0" bIns="0" anchor="t">
             <a:spAutoFit/>
           </a:bodyPr>
           <a:lstStyle/>
@@ -9446,12 +9796,12 @@
           <a:noFill/>
         </p:spPr>
         <p:txBody>
-          <a:bodyPr wrap="square" anchor="t" lIns="0" rIns="0" tIns="0" bIns="0">
+          <a:bodyPr wrap="square" lIns="0" tIns="0" rIns="0" bIns="0" anchor="t">
             <a:spAutoFit/>
           </a:bodyPr>
           <a:lstStyle/>
           <a:p>
-            <a:pPr algn="l" marL="0" indent="0">
+            <a:pPr marL="0" indent="0" algn="l">
               <a:lnSpc>
                 <a:spcPct val="108000"/>
               </a:lnSpc>
@@ -9479,7 +9829,7 @@
             </a:r>
           </a:p>
           <a:p>
-            <a:pPr algn="l" marL="0" indent="0">
+            <a:pPr marL="0" indent="0" algn="l">
               <a:lnSpc>
                 <a:spcPct val="108000"/>
               </a:lnSpc>
@@ -9507,7 +9857,7 @@
             </a:r>
           </a:p>
           <a:p>
-            <a:pPr algn="l" marL="0" indent="0">
+            <a:pPr marL="0" indent="0" algn="l">
               <a:lnSpc>
                 <a:spcPct val="108000"/>
               </a:lnSpc>
@@ -9535,7 +9885,7 @@
             </a:r>
           </a:p>
           <a:p>
-            <a:pPr algn="l" marL="0" indent="0">
+            <a:pPr marL="0" indent="0" algn="l">
               <a:lnSpc>
                 <a:spcPct val="108000"/>
               </a:lnSpc>
@@ -9581,7 +9931,7 @@
           <a:noFill/>
         </p:spPr>
         <p:txBody>
-          <a:bodyPr wrap="square" anchor="t" lIns="0" rIns="0" tIns="0" bIns="0">
+          <a:bodyPr wrap="square" lIns="0" tIns="0" rIns="0" bIns="0" anchor="t">
             <a:spAutoFit/>
           </a:bodyPr>
           <a:lstStyle/>
@@ -9620,12 +9970,12 @@
           <a:noFill/>
         </p:spPr>
         <p:txBody>
-          <a:bodyPr wrap="square" anchor="t" lIns="0" rIns="0" tIns="0" bIns="0">
+          <a:bodyPr wrap="square" lIns="0" tIns="0" rIns="0" bIns="0" anchor="t">
             <a:spAutoFit/>
           </a:bodyPr>
           <a:lstStyle/>
           <a:p>
-            <a:pPr algn="l" marL="0" indent="0">
+            <a:pPr marL="0" indent="0" algn="l">
               <a:lnSpc>
                 <a:spcPct val="108000"/>
               </a:lnSpc>
@@ -9662,7 +10012,7 @@
             </a:r>
           </a:p>
           <a:p>
-            <a:pPr algn="l" marL="0" indent="0">
+            <a:pPr marL="0" indent="0" algn="l">
               <a:lnSpc>
                 <a:spcPct val="108000"/>
               </a:lnSpc>
@@ -9690,7 +10040,7 @@
             </a:r>
           </a:p>
           <a:p>
-            <a:pPr algn="l" marL="0" indent="0">
+            <a:pPr marL="0" indent="0" algn="l">
               <a:lnSpc>
                 <a:spcPct val="108000"/>
               </a:lnSpc>
@@ -9718,7 +10068,7 @@
             </a:r>
           </a:p>
           <a:p>
-            <a:pPr algn="l" marL="0" indent="0">
+            <a:pPr marL="0" indent="0" algn="l">
               <a:lnSpc>
                 <a:spcPct val="108000"/>
               </a:lnSpc>
@@ -9746,7 +10096,7 @@
             </a:r>
           </a:p>
           <a:p>
-            <a:pPr algn="l" marL="0" indent="0">
+            <a:pPr marL="0" indent="0" algn="l">
               <a:lnSpc>
                 <a:spcPct val="108000"/>
               </a:lnSpc>
@@ -9784,7 +10134,7 @@
 </file>
 
 <file path=ppt/slides/slide7.xml><?xml version="1.0" encoding="utf-8"?>
-<p:sld xmlns:a="http://schemas.openxmlformats.org/drawingml/2006/main" xmlns:p="http://schemas.openxmlformats.org/presentationml/2006/main" xmlns:r="http://schemas.openxmlformats.org/officeDocument/2006/relationships">
+<p:sld xmlns:a="http://schemas.openxmlformats.org/drawingml/2006/main" xmlns:r="http://schemas.openxmlformats.org/officeDocument/2006/relationships" xmlns:p="http://schemas.openxmlformats.org/presentationml/2006/main">
   <p:cSld>
     <p:bg>
       <p:bgPr>
@@ -9800,7 +10150,14 @@
         <p:cNvGrpSpPr/>
         <p:nvPr/>
       </p:nvGrpSpPr>
-      <p:grpSpPr/>
+      <p:grpSpPr>
+        <a:xfrm>
+          <a:off x="0" y="0"/>
+          <a:ext cx="0" cy="0"/>
+          <a:chOff x="0" y="0"/>
+          <a:chExt cx="0" cy="0"/>
+        </a:xfrm>
+      </p:grpSpPr>
       <p:sp>
         <p:nvSpPr>
           <p:cNvPr id="2" name="Rectangle 1"/>
@@ -9842,6 +10199,7 @@
           <a:lstStyle/>
           <a:p>
             <a:pPr algn="ctr"/>
+            <a:endParaRPr/>
           </a:p>
         </p:txBody>
       </p:sp>
@@ -9886,6 +10244,7 @@
           <a:lstStyle/>
           <a:p>
             <a:pPr algn="ctr"/>
+            <a:endParaRPr/>
           </a:p>
         </p:txBody>
       </p:sp>
@@ -9906,7 +10265,7 @@
           <a:noFill/>
         </p:spPr>
         <p:txBody>
-          <a:bodyPr wrap="square" anchor="t" lIns="0" rIns="0" tIns="0" bIns="0">
+          <a:bodyPr wrap="square" lIns="0" tIns="0" rIns="0" bIns="0" anchor="t">
             <a:spAutoFit/>
           </a:bodyPr>
           <a:lstStyle/>
@@ -9945,7 +10304,7 @@
           <a:noFill/>
         </p:spPr>
         <p:txBody>
-          <a:bodyPr wrap="square" anchor="t" lIns="0" rIns="0" tIns="0" bIns="0">
+          <a:bodyPr wrap="square" lIns="0" tIns="0" rIns="0" bIns="0" anchor="t">
             <a:spAutoFit/>
           </a:bodyPr>
           <a:lstStyle/>
@@ -9984,7 +10343,7 @@
           <a:noFill/>
         </p:spPr>
         <p:txBody>
-          <a:bodyPr wrap="square" anchor="t" lIns="0" rIns="0" tIns="0" bIns="0">
+          <a:bodyPr wrap="square" lIns="0" tIns="0" rIns="0" bIns="0" anchor="t">
             <a:spAutoFit/>
           </a:bodyPr>
           <a:lstStyle/>
@@ -10023,7 +10382,7 @@
           <a:noFill/>
         </p:spPr>
         <p:txBody>
-          <a:bodyPr wrap="square" anchor="t" lIns="0" rIns="0" tIns="0" bIns="0">
+          <a:bodyPr wrap="square" lIns="0" tIns="0" rIns="0" bIns="0" anchor="t">
             <a:spAutoFit/>
           </a:bodyPr>
           <a:lstStyle/>
@@ -10086,6 +10445,7 @@
           <a:lstStyle/>
           <a:p>
             <a:pPr algn="ctr"/>
+            <a:endParaRPr/>
           </a:p>
         </p:txBody>
       </p:sp>
@@ -10106,7 +10466,7 @@
           <a:noFill/>
         </p:spPr>
         <p:txBody>
-          <a:bodyPr wrap="square" anchor="ctr" lIns="0" rIns="0" tIns="0" bIns="0">
+          <a:bodyPr wrap="square" lIns="0" tIns="0" rIns="0" bIns="0" anchor="ctr">
             <a:spAutoFit/>
           </a:bodyPr>
           <a:lstStyle/>
@@ -10145,7 +10505,7 @@
           <a:noFill/>
         </p:spPr>
         <p:txBody>
-          <a:bodyPr wrap="square" anchor="ctr" lIns="0" rIns="0" tIns="0" bIns="0">
+          <a:bodyPr wrap="square" lIns="0" tIns="0" rIns="0" bIns="0" anchor="ctr">
             <a:spAutoFit/>
           </a:bodyPr>
           <a:lstStyle/>
@@ -10208,6 +10568,7 @@
           <a:lstStyle/>
           <a:p>
             <a:pPr algn="ctr"/>
+            <a:endParaRPr/>
           </a:p>
         </p:txBody>
       </p:sp>
@@ -10228,7 +10589,7 @@
           <a:noFill/>
         </p:spPr>
         <p:txBody>
-          <a:bodyPr wrap="square" anchor="ctr" lIns="0" rIns="0" tIns="0" bIns="0">
+          <a:bodyPr wrap="square" lIns="0" tIns="0" rIns="0" bIns="0" anchor="ctr">
             <a:spAutoFit/>
           </a:bodyPr>
           <a:lstStyle/>
@@ -10267,7 +10628,7 @@
           <a:noFill/>
         </p:spPr>
         <p:txBody>
-          <a:bodyPr wrap="square" anchor="ctr" lIns="0" rIns="0" tIns="0" bIns="0">
+          <a:bodyPr wrap="square" lIns="0" tIns="0" rIns="0" bIns="0" anchor="ctr">
             <a:spAutoFit/>
           </a:bodyPr>
           <a:lstStyle/>
@@ -10330,6 +10691,7 @@
           <a:lstStyle/>
           <a:p>
             <a:pPr algn="ctr"/>
+            <a:endParaRPr/>
           </a:p>
         </p:txBody>
       </p:sp>
@@ -10350,7 +10712,7 @@
           <a:noFill/>
         </p:spPr>
         <p:txBody>
-          <a:bodyPr wrap="square" anchor="ctr" lIns="0" rIns="0" tIns="0" bIns="0">
+          <a:bodyPr wrap="square" lIns="0" tIns="0" rIns="0" bIns="0" anchor="ctr">
             <a:spAutoFit/>
           </a:bodyPr>
           <a:lstStyle/>
@@ -10389,7 +10751,7 @@
           <a:noFill/>
         </p:spPr>
         <p:txBody>
-          <a:bodyPr wrap="square" anchor="ctr" lIns="0" rIns="0" tIns="0" bIns="0">
+          <a:bodyPr wrap="square" lIns="0" tIns="0" rIns="0" bIns="0" anchor="ctr">
             <a:spAutoFit/>
           </a:bodyPr>
           <a:lstStyle/>
@@ -10452,6 +10814,7 @@
           <a:lstStyle/>
           <a:p>
             <a:pPr algn="ctr"/>
+            <a:endParaRPr/>
           </a:p>
         </p:txBody>
       </p:sp>
@@ -10472,7 +10835,7 @@
           <a:noFill/>
         </p:spPr>
         <p:txBody>
-          <a:bodyPr wrap="square" anchor="ctr" lIns="0" rIns="0" tIns="0" bIns="0">
+          <a:bodyPr wrap="square" lIns="0" tIns="0" rIns="0" bIns="0" anchor="ctr">
             <a:spAutoFit/>
           </a:bodyPr>
           <a:lstStyle/>
@@ -10511,7 +10874,7 @@
           <a:noFill/>
         </p:spPr>
         <p:txBody>
-          <a:bodyPr wrap="square" anchor="ctr" lIns="0" rIns="0" tIns="0" bIns="0">
+          <a:bodyPr wrap="square" lIns="0" tIns="0" rIns="0" bIns="0" anchor="ctr">
             <a:spAutoFit/>
           </a:bodyPr>
           <a:lstStyle/>
@@ -10574,6 +10937,7 @@
           <a:lstStyle/>
           <a:p>
             <a:pPr algn="ctr"/>
+            <a:endParaRPr/>
           </a:p>
         </p:txBody>
       </p:sp>
@@ -10594,7 +10958,7 @@
           <a:noFill/>
         </p:spPr>
         <p:txBody>
-          <a:bodyPr wrap="square" anchor="t" lIns="0" rIns="0" tIns="0" bIns="0">
+          <a:bodyPr wrap="square" lIns="0" tIns="0" rIns="0" bIns="0" anchor="t">
             <a:spAutoFit/>
           </a:bodyPr>
           <a:lstStyle/>
@@ -10633,12 +10997,12 @@
           <a:noFill/>
         </p:spPr>
         <p:txBody>
-          <a:bodyPr wrap="square" anchor="t" lIns="0" rIns="0" tIns="0" bIns="0">
+          <a:bodyPr wrap="square" lIns="0" tIns="0" rIns="0" bIns="0" anchor="t">
             <a:spAutoFit/>
           </a:bodyPr>
           <a:lstStyle/>
           <a:p>
-            <a:pPr algn="l" marL="0" indent="0">
+            <a:pPr marL="0" indent="0" algn="l">
               <a:lnSpc>
                 <a:spcPct val="108000"/>
               </a:lnSpc>
@@ -10675,7 +11039,7 @@
             </a:r>
           </a:p>
           <a:p>
-            <a:pPr algn="l" marL="0" indent="0">
+            <a:pPr marL="0" indent="0" algn="l">
               <a:lnSpc>
                 <a:spcPct val="108000"/>
               </a:lnSpc>
@@ -10703,7 +11067,7 @@
             </a:r>
           </a:p>
           <a:p>
-            <a:pPr algn="l" marL="0" indent="0">
+            <a:pPr marL="0" indent="0" algn="l">
               <a:lnSpc>
                 <a:spcPct val="108000"/>
               </a:lnSpc>
@@ -10741,7 +11105,7 @@
 </file>
 
 <file path=ppt/slides/slide8.xml><?xml version="1.0" encoding="utf-8"?>
-<p:sld xmlns:a="http://schemas.openxmlformats.org/drawingml/2006/main" xmlns:p="http://schemas.openxmlformats.org/presentationml/2006/main" xmlns:r="http://schemas.openxmlformats.org/officeDocument/2006/relationships">
+<p:sld xmlns:a="http://schemas.openxmlformats.org/drawingml/2006/main" xmlns:r="http://schemas.openxmlformats.org/officeDocument/2006/relationships" xmlns:p="http://schemas.openxmlformats.org/presentationml/2006/main">
   <p:cSld>
     <p:bg>
       <p:bgPr>
@@ -10757,7 +11121,14 @@
         <p:cNvGrpSpPr/>
         <p:nvPr/>
       </p:nvGrpSpPr>
-      <p:grpSpPr/>
+      <p:grpSpPr>
+        <a:xfrm>
+          <a:off x="0" y="0"/>
+          <a:ext cx="0" cy="0"/>
+          <a:chOff x="0" y="0"/>
+          <a:chExt cx="0" cy="0"/>
+        </a:xfrm>
+      </p:grpSpPr>
       <p:sp>
         <p:nvSpPr>
           <p:cNvPr id="2" name="Rectangle 1"/>
@@ -10799,6 +11170,7 @@
           <a:lstStyle/>
           <a:p>
             <a:pPr algn="ctr"/>
+            <a:endParaRPr/>
           </a:p>
         </p:txBody>
       </p:sp>
@@ -10843,6 +11215,7 @@
           <a:lstStyle/>
           <a:p>
             <a:pPr algn="ctr"/>
+            <a:endParaRPr/>
           </a:p>
         </p:txBody>
       </p:sp>
@@ -10863,7 +11236,7 @@
           <a:noFill/>
         </p:spPr>
         <p:txBody>
-          <a:bodyPr wrap="square" anchor="t" lIns="0" rIns="0" tIns="0" bIns="0">
+          <a:bodyPr wrap="square" lIns="0" tIns="0" rIns="0" bIns="0" anchor="t">
             <a:spAutoFit/>
           </a:bodyPr>
           <a:lstStyle/>
@@ -10902,7 +11275,7 @@
           <a:noFill/>
         </p:spPr>
         <p:txBody>
-          <a:bodyPr wrap="square" anchor="t" lIns="0" rIns="0" tIns="0" bIns="0">
+          <a:bodyPr wrap="square" lIns="0" tIns="0" rIns="0" bIns="0" anchor="t">
             <a:spAutoFit/>
           </a:bodyPr>
           <a:lstStyle/>
@@ -10941,7 +11314,7 @@
           <a:noFill/>
         </p:spPr>
         <p:txBody>
-          <a:bodyPr wrap="square" anchor="t" lIns="0" rIns="0" tIns="0" bIns="0">
+          <a:bodyPr wrap="square" lIns="0" tIns="0" rIns="0" bIns="0" anchor="t">
             <a:spAutoFit/>
           </a:bodyPr>
           <a:lstStyle/>
@@ -10980,7 +11353,7 @@
           <a:noFill/>
         </p:spPr>
         <p:txBody>
-          <a:bodyPr wrap="square" anchor="t" lIns="0" rIns="0" tIns="0" bIns="0">
+          <a:bodyPr wrap="square" lIns="0" tIns="0" rIns="0" bIns="0" anchor="t">
             <a:spAutoFit/>
           </a:bodyPr>
           <a:lstStyle/>
@@ -11043,6 +11416,7 @@
           <a:lstStyle/>
           <a:p>
             <a:pPr algn="ctr"/>
+            <a:endParaRPr/>
           </a:p>
         </p:txBody>
       </p:sp>
@@ -11087,6 +11461,7 @@
           <a:lstStyle/>
           <a:p>
             <a:pPr algn="ctr"/>
+            <a:endParaRPr/>
           </a:p>
         </p:txBody>
       </p:sp>
@@ -11107,7 +11482,7 @@
           <a:noFill/>
         </p:spPr>
         <p:txBody>
-          <a:bodyPr wrap="square" anchor="t" lIns="0" rIns="0" tIns="0" bIns="0">
+          <a:bodyPr wrap="square" lIns="0" tIns="0" rIns="0" bIns="0" anchor="t">
             <a:spAutoFit/>
           </a:bodyPr>
           <a:lstStyle/>
@@ -11146,7 +11521,7 @@
           <a:noFill/>
         </p:spPr>
         <p:txBody>
-          <a:bodyPr wrap="square" anchor="t" lIns="0" rIns="0" tIns="0" bIns="0">
+          <a:bodyPr wrap="square" lIns="0" tIns="0" rIns="0" bIns="0" anchor="t">
             <a:spAutoFit/>
           </a:bodyPr>
           <a:lstStyle/>
@@ -11209,6 +11584,7 @@
           <a:lstStyle/>
           <a:p>
             <a:pPr algn="ctr"/>
+            <a:endParaRPr/>
           </a:p>
         </p:txBody>
       </p:sp>
@@ -11253,6 +11629,7 @@
           <a:lstStyle/>
           <a:p>
             <a:pPr algn="ctr"/>
+            <a:endParaRPr/>
           </a:p>
         </p:txBody>
       </p:sp>
@@ -11273,7 +11650,7 @@
           <a:noFill/>
         </p:spPr>
         <p:txBody>
-          <a:bodyPr wrap="square" anchor="t" lIns="0" rIns="0" tIns="0" bIns="0">
+          <a:bodyPr wrap="square" lIns="0" tIns="0" rIns="0" bIns="0" anchor="t">
             <a:spAutoFit/>
           </a:bodyPr>
           <a:lstStyle/>
@@ -11312,7 +11689,7 @@
           <a:noFill/>
         </p:spPr>
         <p:txBody>
-          <a:bodyPr wrap="square" anchor="t" lIns="0" rIns="0" tIns="0" bIns="0">
+          <a:bodyPr wrap="square" lIns="0" tIns="0" rIns="0" bIns="0" anchor="t">
             <a:spAutoFit/>
           </a:bodyPr>
           <a:lstStyle/>
@@ -11375,6 +11752,7 @@
           <a:lstStyle/>
           <a:p>
             <a:pPr algn="ctr"/>
+            <a:endParaRPr/>
           </a:p>
         </p:txBody>
       </p:sp>
@@ -11419,6 +11797,7 @@
           <a:lstStyle/>
           <a:p>
             <a:pPr algn="ctr"/>
+            <a:endParaRPr/>
           </a:p>
         </p:txBody>
       </p:sp>
@@ -11439,7 +11818,7 @@
           <a:noFill/>
         </p:spPr>
         <p:txBody>
-          <a:bodyPr wrap="square" anchor="t" lIns="0" rIns="0" tIns="0" bIns="0">
+          <a:bodyPr wrap="square" lIns="0" tIns="0" rIns="0" bIns="0" anchor="t">
             <a:spAutoFit/>
           </a:bodyPr>
           <a:lstStyle/>
@@ -11478,7 +11857,7 @@
           <a:noFill/>
         </p:spPr>
         <p:txBody>
-          <a:bodyPr wrap="square" anchor="t" lIns="0" rIns="0" tIns="0" bIns="0">
+          <a:bodyPr wrap="square" lIns="0" tIns="0" rIns="0" bIns="0" anchor="t">
             <a:spAutoFit/>
           </a:bodyPr>
           <a:lstStyle/>
@@ -11541,6 +11920,7 @@
           <a:lstStyle/>
           <a:p>
             <a:pPr algn="ctr"/>
+            <a:endParaRPr/>
           </a:p>
         </p:txBody>
       </p:sp>
@@ -11585,6 +11965,7 @@
           <a:lstStyle/>
           <a:p>
             <a:pPr algn="ctr"/>
+            <a:endParaRPr/>
           </a:p>
         </p:txBody>
       </p:sp>
@@ -11605,7 +11986,7 @@
           <a:noFill/>
         </p:spPr>
         <p:txBody>
-          <a:bodyPr wrap="square" anchor="t" lIns="0" rIns="0" tIns="0" bIns="0">
+          <a:bodyPr wrap="square" lIns="0" tIns="0" rIns="0" bIns="0" anchor="t">
             <a:spAutoFit/>
           </a:bodyPr>
           <a:lstStyle/>
@@ -11644,7 +12025,7 @@
           <a:noFill/>
         </p:spPr>
         <p:txBody>
-          <a:bodyPr wrap="square" anchor="t" lIns="0" rIns="0" tIns="0" bIns="0">
+          <a:bodyPr wrap="square" lIns="0" tIns="0" rIns="0" bIns="0" anchor="t">
             <a:spAutoFit/>
           </a:bodyPr>
           <a:lstStyle/>
@@ -11683,7 +12064,7 @@
           <a:noFill/>
         </p:spPr>
         <p:txBody>
-          <a:bodyPr wrap="square" anchor="t" lIns="0" rIns="0" tIns="0" bIns="0">
+          <a:bodyPr wrap="square" lIns="0" tIns="0" rIns="0" bIns="0" anchor="t">
             <a:spAutoFit/>
           </a:bodyPr>
           <a:lstStyle/>
@@ -11724,8 +12105,20 @@
                 <a:tableStyleId>{5C22544A-7EE6-4342-B048-85BDC9FD1C3A}</a:tableStyleId>
               </a:tblPr>
               <a:tblGrid>
-                <a:gridCol w="3761841"/>
-                <a:gridCol w="1770278"/>
+                <a:gridCol w="3761841">
+                  <a:extLst>
+                    <a:ext uri="{9D8B030D-6E8A-4147-A177-3AD203B41FA5}">
+                      <a16:colId xmlns:a16="http://schemas.microsoft.com/office/drawing/2014/main" val="20000"/>
+                    </a:ext>
+                  </a:extLst>
+                </a:gridCol>
+                <a:gridCol w="1770278">
+                  <a:extLst>
+                    <a:ext uri="{9D8B030D-6E8A-4147-A177-3AD203B41FA5}">
+                      <a16:colId xmlns:a16="http://schemas.microsoft.com/office/drawing/2014/main" val="20001"/>
+                    </a:ext>
+                  </a:extLst>
+                </a:gridCol>
               </a:tblGrid>
               <a:tr h="480060">
                 <a:tc>
@@ -11735,7 +12128,7 @@
                     <a:p>
                       <a:pPr algn="l"/>
                       <a:r>
-                        <a:rPr b="1" sz="1300">
+                        <a:rPr sz="1300" b="1">
                           <a:solidFill>
                             <a:srgbClr val="FFFFFF"/>
                           </a:solidFill>
@@ -11758,7 +12151,7 @@
                     <a:p>
                       <a:pPr algn="l"/>
                       <a:r>
-                        <a:rPr b="1" sz="1300">
+                        <a:rPr sz="1300" b="1">
                           <a:solidFill>
                             <a:srgbClr val="FFFFFF"/>
                           </a:solidFill>
@@ -11774,6 +12167,11 @@
                     </a:solidFill>
                   </a:tcPr>
                 </a:tc>
+                <a:extLst>
+                  <a:ext uri="{0D108BD9-81ED-4DB2-BD59-A6C34878D82A}">
+                    <a16:rowId xmlns:a16="http://schemas.microsoft.com/office/drawing/2014/main" val="10000"/>
+                  </a:ext>
+                </a:extLst>
               </a:tr>
               <a:tr h="480060">
                 <a:tc>
@@ -11820,6 +12218,11 @@
                     </a:solidFill>
                   </a:tcPr>
                 </a:tc>
+                <a:extLst>
+                  <a:ext uri="{0D108BD9-81ED-4DB2-BD59-A6C34878D82A}">
+                    <a16:rowId xmlns:a16="http://schemas.microsoft.com/office/drawing/2014/main" val="10001"/>
+                  </a:ext>
+                </a:extLst>
               </a:tr>
               <a:tr h="480060">
                 <a:tc>
@@ -11866,6 +12269,11 @@
                     </a:solidFill>
                   </a:tcPr>
                 </a:tc>
+                <a:extLst>
+                  <a:ext uri="{0D108BD9-81ED-4DB2-BD59-A6C34878D82A}">
+                    <a16:rowId xmlns:a16="http://schemas.microsoft.com/office/drawing/2014/main" val="10002"/>
+                  </a:ext>
+                </a:extLst>
               </a:tr>
               <a:tr h="480060">
                 <a:tc>
@@ -11912,6 +12320,11 @@
                     </a:solidFill>
                   </a:tcPr>
                 </a:tc>
+                <a:extLst>
+                  <a:ext uri="{0D108BD9-81ED-4DB2-BD59-A6C34878D82A}">
+                    <a16:rowId xmlns:a16="http://schemas.microsoft.com/office/drawing/2014/main" val="10003"/>
+                  </a:ext>
+                </a:extLst>
               </a:tr>
               <a:tr h="480060">
                 <a:tc>
@@ -11958,6 +12371,11 @@
                     </a:solidFill>
                   </a:tcPr>
                 </a:tc>
+                <a:extLst>
+                  <a:ext uri="{0D108BD9-81ED-4DB2-BD59-A6C34878D82A}">
+                    <a16:rowId xmlns:a16="http://schemas.microsoft.com/office/drawing/2014/main" val="10004"/>
+                  </a:ext>
+                </a:extLst>
               </a:tr>
               <a:tr h="480060">
                 <a:tc>
@@ -12004,6 +12422,11 @@
                     </a:solidFill>
                   </a:tcPr>
                 </a:tc>
+                <a:extLst>
+                  <a:ext uri="{0D108BD9-81ED-4DB2-BD59-A6C34878D82A}">
+                    <a16:rowId xmlns:a16="http://schemas.microsoft.com/office/drawing/2014/main" val="10005"/>
+                  </a:ext>
+                </a:extLst>
               </a:tr>
             </a:tbl>
           </a:graphicData>
@@ -12026,7 +12449,7 @@
           <a:noFill/>
         </p:spPr>
         <p:txBody>
-          <a:bodyPr wrap="square" anchor="t" lIns="0" rIns="0" tIns="0" bIns="0">
+          <a:bodyPr wrap="square" lIns="0" tIns="0" rIns="0" bIns="0" anchor="t">
             <a:spAutoFit/>
           </a:bodyPr>
           <a:lstStyle/>
@@ -12057,7 +12480,7 @@
         <p:spPr>
           <a:xfrm>
             <a:off x="6309360" y="3246120"/>
-            <a:ext cx="5349240" cy="2834640"/>
+            <a:ext cx="5349240" cy="1649811"/>
           </a:xfrm>
           <a:prstGeom prst="rect">
             <a:avLst/>
@@ -12065,12 +12488,12 @@
           <a:noFill/>
         </p:spPr>
         <p:txBody>
-          <a:bodyPr wrap="square" anchor="t" lIns="0" rIns="0" tIns="0" bIns="0">
+          <a:bodyPr wrap="square" lIns="0" tIns="0" rIns="0" bIns="0" anchor="t">
             <a:spAutoFit/>
           </a:bodyPr>
           <a:lstStyle/>
           <a:p>
-            <a:pPr algn="l" marL="0" indent="0">
+            <a:pPr marL="0" indent="0" algn="l">
               <a:lnSpc>
                 <a:spcPct val="108000"/>
               </a:lnSpc>
@@ -12079,7 +12502,7 @@
               </a:spcAft>
             </a:pPr>
             <a:r>
-              <a:rPr sz="1250" b="1">
+              <a:rPr sz="1250" b="1" dirty="0">
                 <a:solidFill>
                   <a:srgbClr val="1F7A8C"/>
                 </a:solidFill>
@@ -12088,7 +12511,7 @@
               <a:t>▪  </a:t>
             </a:r>
             <a:r>
-              <a:rPr sz="1250" b="1">
+              <a:rPr sz="1250" b="1" dirty="0">
                 <a:solidFill>
                   <a:srgbClr val="0F2A4A"/>
                 </a:solidFill>
@@ -12097,17 +12520,62 @@
               <a:t>meaning-equivalent</a:t>
             </a:r>
             <a:r>
-              <a:rPr sz="1250" b="0" i="0">
+              <a:rPr lang="en-US" sz="1250" b="1" dirty="0">
+                <a:solidFill>
+                  <a:srgbClr val="0F2A4A"/>
+                </a:solidFill>
+                <a:latin typeface="Calibri"/>
+              </a:rPr>
+              <a:t> </a:t>
+            </a:r>
+            <a:r>
+              <a:rPr sz="1250" b="0" i="0" dirty="0">
                 <a:solidFill>
                   <a:srgbClr val="1A1F2B"/>
                 </a:solidFill>
                 <a:latin typeface="Calibri"/>
               </a:rPr>
-              <a:t>High GraphCodeBERTScore (0.91) vs. lower AST score (0.54) → generated code is often </a:t>
-            </a:r>
-          </a:p>
-          <a:p>
-            <a:pPr algn="l" marL="0" indent="0">
+              <a:t>High </a:t>
+            </a:r>
+            <a:r>
+              <a:rPr sz="1250" b="0" i="0" dirty="0" err="1">
+                <a:solidFill>
+                  <a:srgbClr val="1A1F2B"/>
+                </a:solidFill>
+                <a:latin typeface="Calibri"/>
+              </a:rPr>
+              <a:t>GraphCodeBERTScore</a:t>
+            </a:r>
+            <a:r>
+              <a:rPr sz="1250" b="0" i="0" dirty="0">
+                <a:solidFill>
+                  <a:srgbClr val="1A1F2B"/>
+                </a:solidFill>
+                <a:latin typeface="Calibri"/>
+              </a:rPr>
+              <a:t> (0.91) vs. lower AST score (0.54) → generated code is often </a:t>
+            </a:r>
+            <a:r>
+              <a:rPr sz="1250" b="1" dirty="0">
+                <a:solidFill>
+                  <a:srgbClr val="0F2A4A"/>
+                </a:solidFill>
+                <a:latin typeface="Calibri"/>
+              </a:rPr>
+              <a:t>structurally divergent</a:t>
+            </a:r>
+            <a:r>
+              <a:rPr sz="1250" b="0" i="0" dirty="0">
+                <a:solidFill>
+                  <a:srgbClr val="1A1F2B"/>
+                </a:solidFill>
+                <a:latin typeface="Calibri"/>
+              </a:rPr>
+              <a:t> from ground truth (different idioms / formatting)</a:t>
+            </a:r>
+          </a:p>
+          <a:p>
+            <a:pPr marL="0" indent="0" algn="l">
               <a:lnSpc>
                 <a:spcPct val="108000"/>
               </a:lnSpc>
@@ -12116,7 +12584,7 @@
               </a:spcAft>
             </a:pPr>
             <a:r>
-              <a:rPr sz="1250" b="1">
+              <a:rPr sz="1250" b="1" dirty="0">
                 <a:solidFill>
                   <a:srgbClr val="1F7A8C"/>
                 </a:solidFill>
@@ -12125,26 +12593,17 @@
               <a:t>▪  </a:t>
             </a:r>
             <a:r>
-              <a:rPr sz="1250" b="1">
-                <a:solidFill>
-                  <a:srgbClr val="0F2A4A"/>
-                </a:solidFill>
-                <a:latin typeface="Calibri"/>
-              </a:rPr>
-              <a:t>structurally divergent</a:t>
-            </a:r>
-            <a:r>
-              <a:rPr sz="1250" b="0" i="0">
+              <a:rPr sz="1250" b="0" i="0" dirty="0">
                 <a:solidFill>
                   <a:srgbClr val="1A1F2B"/>
                 </a:solidFill>
                 <a:latin typeface="Calibri"/>
               </a:rPr>
-              <a:t> but </a:t>
-            </a:r>
-          </a:p>
-          <a:p>
-            <a:pPr algn="l" marL="0" indent="0">
+              <a:t>Python (0.7357) and C++ (0.7142) NL→PL scores are close — base model generalizes reasonably across both languages</a:t>
+            </a:r>
+          </a:p>
+          <a:p>
+            <a:pPr marL="0" indent="0" algn="l">
               <a:lnSpc>
                 <a:spcPct val="108000"/>
               </a:lnSpc>
@@ -12153,7 +12612,7 @@
               </a:spcAft>
             </a:pPr>
             <a:r>
-              <a:rPr sz="1250" b="1">
+              <a:rPr sz="1250" b="1" dirty="0">
                 <a:solidFill>
                   <a:srgbClr val="1F7A8C"/>
                 </a:solidFill>
@@ -12162,63 +12621,7 @@
               <a:t>▪  </a:t>
             </a:r>
             <a:r>
-              <a:rPr sz="1250" b="0" i="0">
-                <a:solidFill>
-                  <a:srgbClr val="1A1F2B"/>
-                </a:solidFill>
-                <a:latin typeface="Calibri"/>
-              </a:rPr>
-              <a:t> from ground truth (different idioms / formatting)</a:t>
-            </a:r>
-          </a:p>
-          <a:p>
-            <a:pPr algn="l" marL="0" indent="0">
-              <a:lnSpc>
-                <a:spcPct val="108000"/>
-              </a:lnSpc>
-              <a:spcAft>
-                <a:spcPts val="800"/>
-              </a:spcAft>
-            </a:pPr>
-            <a:r>
-              <a:rPr sz="1250" b="1">
-                <a:solidFill>
-                  <a:srgbClr val="1F7A8C"/>
-                </a:solidFill>
-                <a:latin typeface="Calibri"/>
-              </a:rPr>
-              <a:t>▪  </a:t>
-            </a:r>
-            <a:r>
-              <a:rPr sz="1250" b="0" i="0">
-                <a:solidFill>
-                  <a:srgbClr val="1A1F2B"/>
-                </a:solidFill>
-                <a:latin typeface="Calibri"/>
-              </a:rPr>
-              <a:t>Python (0.7357) and C++ (0.7142) NL→PL scores are close — base model generalizes reasonably across both languages</a:t>
-            </a:r>
-          </a:p>
-          <a:p>
-            <a:pPr algn="l" marL="0" indent="0">
-              <a:lnSpc>
-                <a:spcPct val="108000"/>
-              </a:lnSpc>
-              <a:spcAft>
-                <a:spcPts val="800"/>
-              </a:spcAft>
-            </a:pPr>
-            <a:r>
-              <a:rPr sz="1250" b="1">
-                <a:solidFill>
-                  <a:srgbClr val="1F7A8C"/>
-                </a:solidFill>
-                <a:latin typeface="Calibri"/>
-              </a:rPr>
-              <a:t>▪  </a:t>
-            </a:r>
-            <a:r>
-              <a:rPr sz="1250" b="0" i="0">
+              <a:rPr sz="1250" b="0" i="0" dirty="0">
                 <a:solidFill>
                   <a:srgbClr val="1A1F2B"/>
                 </a:solidFill>
@@ -12238,7 +12641,7 @@
 </file>
 
 <file path=ppt/slides/slide9.xml><?xml version="1.0" encoding="utf-8"?>
-<p:sld xmlns:a="http://schemas.openxmlformats.org/drawingml/2006/main" xmlns:p="http://schemas.openxmlformats.org/presentationml/2006/main" xmlns:r="http://schemas.openxmlformats.org/officeDocument/2006/relationships">
+<p:sld xmlns:a="http://schemas.openxmlformats.org/drawingml/2006/main" xmlns:r="http://schemas.openxmlformats.org/officeDocument/2006/relationships" xmlns:p="http://schemas.openxmlformats.org/presentationml/2006/main">
   <p:cSld>
     <p:bg>
       <p:bgPr>
@@ -12254,7 +12657,14 @@
         <p:cNvGrpSpPr/>
         <p:nvPr/>
       </p:nvGrpSpPr>
-      <p:grpSpPr/>
+      <p:grpSpPr>
+        <a:xfrm>
+          <a:off x="0" y="0"/>
+          <a:ext cx="0" cy="0"/>
+          <a:chOff x="0" y="0"/>
+          <a:chExt cx="0" cy="0"/>
+        </a:xfrm>
+      </p:grpSpPr>
       <p:sp>
         <p:nvSpPr>
           <p:cNvPr id="2" name="Rectangle 1"/>
@@ -12296,6 +12706,7 @@
           <a:lstStyle/>
           <a:p>
             <a:pPr algn="ctr"/>
+            <a:endParaRPr/>
           </a:p>
         </p:txBody>
       </p:sp>
@@ -12340,6 +12751,7 @@
           <a:lstStyle/>
           <a:p>
             <a:pPr algn="ctr"/>
+            <a:endParaRPr/>
           </a:p>
         </p:txBody>
       </p:sp>
@@ -12360,7 +12772,7 @@
           <a:noFill/>
         </p:spPr>
         <p:txBody>
-          <a:bodyPr wrap="square" anchor="t" lIns="0" rIns="0" tIns="0" bIns="0">
+          <a:bodyPr wrap="square" lIns="0" tIns="0" rIns="0" bIns="0" anchor="t">
             <a:spAutoFit/>
           </a:bodyPr>
           <a:lstStyle/>
@@ -12399,7 +12811,7 @@
           <a:noFill/>
         </p:spPr>
         <p:txBody>
-          <a:bodyPr wrap="square" anchor="t" lIns="0" rIns="0" tIns="0" bIns="0">
+          <a:bodyPr wrap="square" lIns="0" tIns="0" rIns="0" bIns="0" anchor="t">
             <a:spAutoFit/>
           </a:bodyPr>
           <a:lstStyle/>
@@ -12438,7 +12850,7 @@
           <a:noFill/>
         </p:spPr>
         <p:txBody>
-          <a:bodyPr wrap="square" anchor="t" lIns="0" rIns="0" tIns="0" bIns="0">
+          <a:bodyPr wrap="square" lIns="0" tIns="0" rIns="0" bIns="0" anchor="t">
             <a:spAutoFit/>
           </a:bodyPr>
           <a:lstStyle/>
@@ -12477,7 +12889,7 @@
           <a:noFill/>
         </p:spPr>
         <p:txBody>
-          <a:bodyPr wrap="square" anchor="t" lIns="0" rIns="0" tIns="0" bIns="0">
+          <a:bodyPr wrap="square" lIns="0" tIns="0" rIns="0" bIns="0" anchor="t">
             <a:spAutoFit/>
           </a:bodyPr>
           <a:lstStyle/>
@@ -12518,8 +12930,20 @@
                 <a:tableStyleId>{5C22544A-7EE6-4342-B048-85BDC9FD1C3A}</a:tableStyleId>
               </a:tblPr>
               <a:tblGrid>
-                <a:gridCol w="5919825"/>
-                <a:gridCol w="5464454"/>
+                <a:gridCol w="5919825">
+                  <a:extLst>
+                    <a:ext uri="{9D8B030D-6E8A-4147-A177-3AD203B41FA5}">
+                      <a16:colId xmlns:a16="http://schemas.microsoft.com/office/drawing/2014/main" val="20000"/>
+                    </a:ext>
+                  </a:extLst>
+                </a:gridCol>
+                <a:gridCol w="5464454">
+                  <a:extLst>
+                    <a:ext uri="{9D8B030D-6E8A-4147-A177-3AD203B41FA5}">
+                      <a16:colId xmlns:a16="http://schemas.microsoft.com/office/drawing/2014/main" val="20001"/>
+                    </a:ext>
+                  </a:extLst>
+                </a:gridCol>
               </a:tblGrid>
               <a:tr h="584200">
                 <a:tc>
@@ -12529,7 +12953,7 @@
                     <a:p>
                       <a:pPr algn="l"/>
                       <a:r>
-                        <a:rPr b="1" sz="1200">
+                        <a:rPr sz="1200" b="1">
                           <a:solidFill>
                             <a:srgbClr val="FFFFFF"/>
                           </a:solidFill>
@@ -12552,7 +12976,7 @@
                     <a:p>
                       <a:pPr algn="l"/>
                       <a:r>
-                        <a:rPr b="1" sz="1200">
+                        <a:rPr sz="1200" b="1">
                           <a:solidFill>
                             <a:srgbClr val="FFFFFF"/>
                           </a:solidFill>
@@ -12568,6 +12992,11 @@
                     </a:solidFill>
                   </a:tcPr>
                 </a:tc>
+                <a:extLst>
+                  <a:ext uri="{0D108BD9-81ED-4DB2-BD59-A6C34878D82A}">
+                    <a16:rowId xmlns:a16="http://schemas.microsoft.com/office/drawing/2014/main" val="10000"/>
+                  </a:ext>
+                </a:extLst>
               </a:tr>
               <a:tr h="584200">
                 <a:tc>
@@ -12591,7 +13020,7 @@
                       </a:r>
                     </a:p>
                   </a:txBody>
-                  <a:tcPr anchor="ctr" marT="38100" marB="38100">
+                  <a:tcPr marT="38100" marB="38100" anchor="ctr">
                     <a:solidFill>
                       <a:srgbClr val="FFFFFF"/>
                     </a:solidFill>
@@ -12618,12 +13047,17 @@
                       </a:r>
                     </a:p>
                   </a:txBody>
-                  <a:tcPr anchor="ctr" marT="38100" marB="38100">
+                  <a:tcPr marT="38100" marB="38100" anchor="ctr">
                     <a:solidFill>
                       <a:srgbClr val="FFFFFF"/>
                     </a:solidFill>
                   </a:tcPr>
                 </a:tc>
+                <a:extLst>
+                  <a:ext uri="{0D108BD9-81ED-4DB2-BD59-A6C34878D82A}">
+                    <a16:rowId xmlns:a16="http://schemas.microsoft.com/office/drawing/2014/main" val="10001"/>
+                  </a:ext>
+                </a:extLst>
               </a:tr>
               <a:tr h="584200">
                 <a:tc>
@@ -12647,7 +13081,7 @@
                       </a:r>
                     </a:p>
                   </a:txBody>
-                  <a:tcPr anchor="ctr" marT="38100" marB="38100">
+                  <a:tcPr marT="38100" marB="38100" anchor="ctr">
                     <a:solidFill>
                       <a:srgbClr val="EEF2F6"/>
                     </a:solidFill>
@@ -12674,12 +13108,17 @@
                       </a:r>
                     </a:p>
                   </a:txBody>
-                  <a:tcPr anchor="ctr" marT="38100" marB="38100">
+                  <a:tcPr marT="38100" marB="38100" anchor="ctr">
                     <a:solidFill>
                       <a:srgbClr val="EEF2F6"/>
                     </a:solidFill>
                   </a:tcPr>
                 </a:tc>
+                <a:extLst>
+                  <a:ext uri="{0D108BD9-81ED-4DB2-BD59-A6C34878D82A}">
+                    <a16:rowId xmlns:a16="http://schemas.microsoft.com/office/drawing/2014/main" val="10002"/>
+                  </a:ext>
+                </a:extLst>
               </a:tr>
               <a:tr h="584200">
                 <a:tc>
@@ -12703,7 +13142,7 @@
                       </a:r>
                     </a:p>
                   </a:txBody>
-                  <a:tcPr anchor="ctr" marT="38100" marB="38100">
+                  <a:tcPr marT="38100" marB="38100" anchor="ctr">
                     <a:solidFill>
                       <a:srgbClr val="FFFFFF"/>
                     </a:solidFill>
@@ -12730,12 +13169,17 @@
                       </a:r>
                     </a:p>
                   </a:txBody>
-                  <a:tcPr anchor="ctr" marT="38100" marB="38100">
+                  <a:tcPr marT="38100" marB="38100" anchor="ctr">
                     <a:solidFill>
                       <a:srgbClr val="FFFFFF"/>
                     </a:solidFill>
                   </a:tcPr>
                 </a:tc>
+                <a:extLst>
+                  <a:ext uri="{0D108BD9-81ED-4DB2-BD59-A6C34878D82A}">
+                    <a16:rowId xmlns:a16="http://schemas.microsoft.com/office/drawing/2014/main" val="10003"/>
+                  </a:ext>
+                </a:extLst>
               </a:tr>
               <a:tr h="584200">
                 <a:tc>
@@ -12759,7 +13203,7 @@
                       </a:r>
                     </a:p>
                   </a:txBody>
-                  <a:tcPr anchor="ctr" marT="38100" marB="38100">
+                  <a:tcPr marT="38100" marB="38100" anchor="ctr">
                     <a:solidFill>
                       <a:srgbClr val="EEF2F6"/>
                     </a:solidFill>
@@ -12786,12 +13230,17 @@
                       </a:r>
                     </a:p>
                   </a:txBody>
-                  <a:tcPr anchor="ctr" marT="38100" marB="38100">
+                  <a:tcPr marT="38100" marB="38100" anchor="ctr">
                     <a:solidFill>
                       <a:srgbClr val="EEF2F6"/>
                     </a:solidFill>
                   </a:tcPr>
                 </a:tc>
+                <a:extLst>
+                  <a:ext uri="{0D108BD9-81ED-4DB2-BD59-A6C34878D82A}">
+                    <a16:rowId xmlns:a16="http://schemas.microsoft.com/office/drawing/2014/main" val="10004"/>
+                  </a:ext>
+                </a:extLst>
               </a:tr>
               <a:tr h="584200">
                 <a:tc>
@@ -12815,7 +13264,7 @@
                       </a:r>
                     </a:p>
                   </a:txBody>
-                  <a:tcPr anchor="ctr" marT="38100" marB="38100">
+                  <a:tcPr marT="38100" marB="38100" anchor="ctr">
                     <a:solidFill>
                       <a:srgbClr val="FFFFFF"/>
                     </a:solidFill>
@@ -12842,12 +13291,17 @@
                       </a:r>
                     </a:p>
                   </a:txBody>
-                  <a:tcPr anchor="ctr" marT="38100" marB="38100">
+                  <a:tcPr marT="38100" marB="38100" anchor="ctr">
                     <a:solidFill>
                       <a:srgbClr val="FFFFFF"/>
                     </a:solidFill>
                   </a:tcPr>
                 </a:tc>
+                <a:extLst>
+                  <a:ext uri="{0D108BD9-81ED-4DB2-BD59-A6C34878D82A}">
+                    <a16:rowId xmlns:a16="http://schemas.microsoft.com/office/drawing/2014/main" val="10005"/>
+                  </a:ext>
+                </a:extLst>
               </a:tr>
               <a:tr h="584200">
                 <a:tc>
@@ -12871,7 +13325,7 @@
                       </a:r>
                     </a:p>
                   </a:txBody>
-                  <a:tcPr anchor="ctr" marT="38100" marB="38100">
+                  <a:tcPr marT="38100" marB="38100" anchor="ctr">
                     <a:solidFill>
                       <a:srgbClr val="EEF2F6"/>
                     </a:solidFill>
@@ -12898,12 +13352,17 @@
                       </a:r>
                     </a:p>
                   </a:txBody>
-                  <a:tcPr anchor="ctr" marT="38100" marB="38100">
+                  <a:tcPr marT="38100" marB="38100" anchor="ctr">
                     <a:solidFill>
                       <a:srgbClr val="EEF2F6"/>
                     </a:solidFill>
                   </a:tcPr>
                 </a:tc>
+                <a:extLst>
+                  <a:ext uri="{0D108BD9-81ED-4DB2-BD59-A6C34878D82A}">
+                    <a16:rowId xmlns:a16="http://schemas.microsoft.com/office/drawing/2014/main" val="10006"/>
+                  </a:ext>
+                </a:extLst>
               </a:tr>
               <a:tr h="584200">
                 <a:tc>
@@ -12927,7 +13386,7 @@
                       </a:r>
                     </a:p>
                   </a:txBody>
-                  <a:tcPr anchor="ctr" marT="38100" marB="38100">
+                  <a:tcPr marT="38100" marB="38100" anchor="ctr">
                     <a:solidFill>
                       <a:srgbClr val="FFFFFF"/>
                     </a:solidFill>
@@ -12954,12 +13413,17 @@
                       </a:r>
                     </a:p>
                   </a:txBody>
-                  <a:tcPr anchor="ctr" marT="38100" marB="38100">
+                  <a:tcPr marT="38100" marB="38100" anchor="ctr">
                     <a:solidFill>
                       <a:srgbClr val="FFFFFF"/>
                     </a:solidFill>
                   </a:tcPr>
                 </a:tc>
+                <a:extLst>
+                  <a:ext uri="{0D108BD9-81ED-4DB2-BD59-A6C34878D82A}">
+                    <a16:rowId xmlns:a16="http://schemas.microsoft.com/office/drawing/2014/main" val="10007"/>
+                  </a:ext>
+                </a:extLst>
               </a:tr>
               <a:tr h="584200">
                 <a:tc>
@@ -12983,7 +13447,7 @@
                       </a:r>
                     </a:p>
                   </a:txBody>
-                  <a:tcPr anchor="ctr" marT="38100" marB="38100">
+                  <a:tcPr marT="38100" marB="38100" anchor="ctr">
                     <a:solidFill>
                       <a:srgbClr val="EEF2F6"/>
                     </a:solidFill>
@@ -13010,12 +13474,17 @@
                       </a:r>
                     </a:p>
                   </a:txBody>
-                  <a:tcPr anchor="ctr" marT="38100" marB="38100">
+                  <a:tcPr marT="38100" marB="38100" anchor="ctr">
                     <a:solidFill>
                       <a:srgbClr val="EEF2F6"/>
                     </a:solidFill>
                   </a:tcPr>
                 </a:tc>
+                <a:extLst>
+                  <a:ext uri="{0D108BD9-81ED-4DB2-BD59-A6C34878D82A}">
+                    <a16:rowId xmlns:a16="http://schemas.microsoft.com/office/drawing/2014/main" val="10008"/>
+                  </a:ext>
+                </a:extLst>
               </a:tr>
             </a:tbl>
           </a:graphicData>
@@ -13347,4 +13816,10 @@
   </a:objectDefaults>
   <a:extraClrSchemeLst/>
 </a:theme>
+</file>
+
+<file path=docMetadata/LabelInfo.xml><?xml version="1.0" encoding="utf-8"?>
+<clbl:labelList xmlns:clbl="http://schemas.microsoft.com/office/2020/mipLabelMetadata">
+  <clbl:label id="{4447dd6a-a4a1-440b-a6a3-9124ef1ee017}" enabled="1" method="Privileged" siteId="{7a18110d-ef9b-4274-acef-e62ab0fe28ed}" contentBits="0" removed="0"/>
+</clbl:labelList>
 </file>
--- a/Group-30/Presentation/Group30-CodeGen-Capstone-Presentation.pptx
+++ b/Group-30/Presentation/Group30-CodeGen-Capstone-Presentation.pptx
@@ -3285,7 +3285,7 @@
         <p:spPr>
           <a:xfrm>
             <a:off x="868680" y="2880360"/>
-            <a:ext cx="10332720" cy="822960"/>
+            <a:ext cx="10332720" cy="703975"/>
           </a:xfrm>
           <a:prstGeom prst="rect">
             <a:avLst/>
@@ -3304,7 +3304,7 @@
               </a:lnSpc>
             </a:pPr>
             <a:r>
-              <a:rPr sz="1900" b="0" i="1">
+              <a:rPr sz="1900" b="0" i="1" dirty="0">
                 <a:solidFill>
                   <a:srgbClr val="C7D9E2"/>
                 </a:solidFill>
@@ -3312,15 +3312,35 @@
               </a:rPr>
               <a:t>Cross-Language Code Generation with Fine-Tuned LLMs</a:t>
             </a:r>
-            <a:br/>
-            <a:r>
-              <a:rPr sz="1900" b="0" i="1">
+            <a:br>
+              <a:rPr dirty="0"/>
+            </a:br>
+            <a:r>
+              <a:rPr sz="1900" b="0" i="1" dirty="0">
                 <a:solidFill>
                   <a:srgbClr val="C7D9E2"/>
                 </a:solidFill>
                 <a:latin typeface="Calibri"/>
               </a:rPr>
-              <a:t>Natural Language → Python → C++, with Voice-Enabled Interaction</a:t>
+              <a:t>Natural Language → Python </a:t>
+            </a:r>
+            <a:r>
+              <a:rPr lang="en-US" sz="1900" b="0" i="1" dirty="0">
+                <a:solidFill>
+                  <a:srgbClr val="C7D9E2"/>
+                </a:solidFill>
+                <a:latin typeface="Calibri"/>
+              </a:rPr>
+              <a:t> or C++, Python </a:t>
+            </a:r>
+            <a:r>
+              <a:rPr sz="1900" b="0" i="1" dirty="0">
+                <a:solidFill>
+                  <a:srgbClr val="C7D9E2"/>
+                </a:solidFill>
+                <a:latin typeface="Calibri"/>
+              </a:rPr>
+              <a:t>→ C++, with Voice-Enabled Interaction</a:t>
             </a:r>
           </a:p>
         </p:txBody>
@@ -4487,13 +4507,22 @@
               </a:lnSpc>
             </a:pPr>
             <a:r>
-              <a:rPr sz="1200" b="0" i="1">
+              <a:rPr sz="1200" b="0" i="1" dirty="0" err="1">
                 <a:solidFill>
                   <a:srgbClr val="555F6E"/>
                 </a:solidFill>
                 <a:latin typeface="Calibri"/>
               </a:rPr>
-              <a:t>CodeGen — IIIT Hyderabad Capstone Project, Group 30</a:t>
+              <a:t>CodeGen</a:t>
+            </a:r>
+            <a:r>
+              <a:rPr sz="1200" b="0" i="1" dirty="0">
+                <a:solidFill>
+                  <a:srgbClr val="555F6E"/>
+                </a:solidFill>
+                <a:latin typeface="Calibri"/>
+              </a:rPr>
+              <a:t> — IIIT Hyderabad Capstone Project, Group 30</a:t>
             </a:r>
           </a:p>
         </p:txBody>
@@ -4825,7 +4854,7 @@
         <p:spPr>
           <a:xfrm>
             <a:off x="502920" y="1627632"/>
-            <a:ext cx="11155680" cy="777240"/>
+            <a:ext cx="11155680" cy="731290"/>
           </a:xfrm>
           <a:prstGeom prst="rect">
             <a:avLst/>
@@ -4844,13 +4873,31 @@
               </a:lnSpc>
             </a:pPr>
             <a:r>
-              <a:rPr sz="1350" b="0" i="0">
+              <a:rPr sz="1350" b="0" i="0" dirty="0">
                 <a:solidFill>
                   <a:srgbClr val="1A1F2B"/>
                 </a:solidFill>
                 <a:latin typeface="Calibri"/>
               </a:rPr>
-              <a:t>LLMs increasingly understand and synthesize code, not just natural language. This project applies and fine-tunes an LLM to translate between natural language and two programming languages (Python, C++) — demonstrating a path to extend code-generation support to languages an LLM was not originally trained on.</a:t>
+              <a:t>LLMs increasingly understand and synthesize code, not just natural language. This project applies and fine-tunes an LLM to translate between natural language and two programming languages (Python, C++) </a:t>
+            </a:r>
+            <a:r>
+              <a:rPr lang="en-US" sz="1350" b="0" i="0" dirty="0">
+                <a:solidFill>
+                  <a:srgbClr val="1A1F2B"/>
+                </a:solidFill>
+                <a:latin typeface="Calibri"/>
+              </a:rPr>
+              <a:t>and Python to C++ translation</a:t>
+            </a:r>
+            <a:r>
+              <a:rPr sz="1350" b="0" i="0" dirty="0">
+                <a:solidFill>
+                  <a:srgbClr val="1A1F2B"/>
+                </a:solidFill>
+                <a:latin typeface="Calibri"/>
+              </a:rPr>
+              <a:t>— demonstrating a path to extend code-generation support to languages an LLM was not originally trained on.</a:t>
             </a:r>
           </a:p>
         </p:txBody>

--- a/Group-30/Presentation/Group30-CodeGen-Capstone-Presentation.pptx
+++ b/Group-30/Presentation/Group30-CodeGen-Capstone-Presentation.pptx
@@ -312,7 +312,7 @@
           <a:p>
             <a:fld id="{5BCAD085-E8A6-8845-BD4E-CB4CCA059FC4}" type="datetimeFigureOut">
               <a:rPr lang="en-US" smtClean="0"/>
-              <a:t>7/5/2026</a:t>
+              <a:t>8/1/26</a:t>
             </a:fld>
             <a:endParaRPr lang="en-US"/>
           </a:p>
@@ -480,7 +480,7 @@
           <a:p>
             <a:fld id="{5BCAD085-E8A6-8845-BD4E-CB4CCA059FC4}" type="datetimeFigureOut">
               <a:rPr lang="en-US" smtClean="0"/>
-              <a:t>7/5/2026</a:t>
+              <a:t>8/1/26</a:t>
             </a:fld>
             <a:endParaRPr lang="en-US"/>
           </a:p>
@@ -658,7 +658,7 @@
           <a:p>
             <a:fld id="{5BCAD085-E8A6-8845-BD4E-CB4CCA059FC4}" type="datetimeFigureOut">
               <a:rPr lang="en-US" smtClean="0"/>
-              <a:t>7/5/2026</a:t>
+              <a:t>8/1/26</a:t>
             </a:fld>
             <a:endParaRPr lang="en-US"/>
           </a:p>
@@ -826,7 +826,7 @@
           <a:p>
             <a:fld id="{5BCAD085-E8A6-8845-BD4E-CB4CCA059FC4}" type="datetimeFigureOut">
               <a:rPr lang="en-US" smtClean="0"/>
-              <a:t>7/5/2026</a:t>
+              <a:t>8/1/26</a:t>
             </a:fld>
             <a:endParaRPr lang="en-US"/>
           </a:p>
@@ -1071,7 +1071,7 @@
           <a:p>
             <a:fld id="{5BCAD085-E8A6-8845-BD4E-CB4CCA059FC4}" type="datetimeFigureOut">
               <a:rPr lang="en-US" smtClean="0"/>
-              <a:t>7/5/2026</a:t>
+              <a:t>8/1/26</a:t>
             </a:fld>
             <a:endParaRPr lang="en-US"/>
           </a:p>
@@ -1356,7 +1356,7 @@
           <a:p>
             <a:fld id="{5BCAD085-E8A6-8845-BD4E-CB4CCA059FC4}" type="datetimeFigureOut">
               <a:rPr lang="en-US" smtClean="0"/>
-              <a:t>7/5/2026</a:t>
+              <a:t>8/1/26</a:t>
             </a:fld>
             <a:endParaRPr lang="en-US"/>
           </a:p>
@@ -1775,7 +1775,7 @@
           <a:p>
             <a:fld id="{5BCAD085-E8A6-8845-BD4E-CB4CCA059FC4}" type="datetimeFigureOut">
               <a:rPr lang="en-US" smtClean="0"/>
-              <a:t>7/5/2026</a:t>
+              <a:t>8/1/26</a:t>
             </a:fld>
             <a:endParaRPr lang="en-US"/>
           </a:p>
@@ -1892,7 +1892,7 @@
           <a:p>
             <a:fld id="{5BCAD085-E8A6-8845-BD4E-CB4CCA059FC4}" type="datetimeFigureOut">
               <a:rPr lang="en-US" smtClean="0"/>
-              <a:t>7/5/2026</a:t>
+              <a:t>8/1/26</a:t>
             </a:fld>
             <a:endParaRPr lang="en-US"/>
           </a:p>
@@ -1987,7 +1987,7 @@
           <a:p>
             <a:fld id="{5BCAD085-E8A6-8845-BD4E-CB4CCA059FC4}" type="datetimeFigureOut">
               <a:rPr lang="en-US" smtClean="0"/>
-              <a:t>7/5/2026</a:t>
+              <a:t>8/1/26</a:t>
             </a:fld>
             <a:endParaRPr lang="en-US"/>
           </a:p>
@@ -2262,7 +2262,7 @@
           <a:p>
             <a:fld id="{5BCAD085-E8A6-8845-BD4E-CB4CCA059FC4}" type="datetimeFigureOut">
               <a:rPr lang="en-US" smtClean="0"/>
-              <a:t>7/5/2026</a:t>
+              <a:t>8/1/26</a:t>
             </a:fld>
             <a:endParaRPr lang="en-US"/>
           </a:p>
@@ -2514,7 +2514,7 @@
           <a:p>
             <a:fld id="{5BCAD085-E8A6-8845-BD4E-CB4CCA059FC4}" type="datetimeFigureOut">
               <a:rPr lang="en-US" smtClean="0"/>
-              <a:t>7/5/2026</a:t>
+              <a:t>8/1/26</a:t>
             </a:fld>
             <a:endParaRPr lang="en-US"/>
           </a:p>
@@ -2725,7 +2725,7 @@
           <a:p>
             <a:fld id="{5BCAD085-E8A6-8845-BD4E-CB4CCA059FC4}" type="datetimeFigureOut">
               <a:rPr lang="en-US" smtClean="0"/>
-              <a:t>7/5/2026</a:t>
+              <a:t>8/1/26</a:t>
             </a:fld>
             <a:endParaRPr lang="en-US"/>
           </a:p>
@@ -3438,7 +3438,7 @@
         <p:spPr>
           <a:xfrm>
             <a:off x="868680" y="4572000"/>
-            <a:ext cx="5120640" cy="1463040"/>
+            <a:ext cx="5120640" cy="1359090"/>
           </a:xfrm>
           <a:prstGeom prst="rect">
             <a:avLst/>
@@ -3460,7 +3460,7 @@
               </a:spcAft>
             </a:pPr>
             <a:r>
-              <a:rPr sz="1600" b="1">
+              <a:rPr sz="1600" b="1" dirty="0">
                 <a:solidFill>
                   <a:srgbClr val="1F7A8C"/>
                 </a:solidFill>
@@ -3469,7 +3469,7 @@
               <a:t>▪  </a:t>
             </a:r>
             <a:r>
-              <a:rPr sz="1600" b="0" i="0">
+              <a:rPr sz="1600" b="0" i="0" dirty="0">
                 <a:solidFill>
                   <a:srgbClr val="FFFFFF"/>
                 </a:solidFill>
@@ -3488,7 +3488,7 @@
               </a:spcAft>
             </a:pPr>
             <a:r>
-              <a:rPr sz="1600" b="1">
+              <a:rPr sz="1600" b="1" dirty="0">
                 <a:solidFill>
                   <a:srgbClr val="1F7A8C"/>
                 </a:solidFill>
@@ -3497,7 +3497,7 @@
               <a:t>▪  </a:t>
             </a:r>
             <a:r>
-              <a:rPr sz="1600" b="0" i="0">
+              <a:rPr sz="1600" b="0" i="0" dirty="0">
                 <a:solidFill>
                   <a:srgbClr val="FFFFFF"/>
                 </a:solidFill>
@@ -3531,7 +3531,34 @@
                 </a:solidFill>
                 <a:latin typeface="Calibri"/>
               </a:rPr>
-              <a:t>Kihim Lohitha</a:t>
+              <a:t>Ki</a:t>
+            </a:r>
+            <a:r>
+              <a:rPr lang="en-US" sz="1600" b="0" i="0">
+                <a:solidFill>
+                  <a:srgbClr val="FFFFFF"/>
+                </a:solidFill>
+                <a:latin typeface="Calibri"/>
+              </a:rPr>
+              <a:t>l</a:t>
+            </a:r>
+            <a:r>
+              <a:rPr sz="1600" b="0" i="0">
+                <a:solidFill>
+                  <a:srgbClr val="FFFFFF"/>
+                </a:solidFill>
+                <a:latin typeface="Calibri"/>
+              </a:rPr>
+              <a:t>im </a:t>
+            </a:r>
+            <a:r>
+              <a:rPr sz="1600" b="0" i="0" dirty="0">
+                <a:solidFill>
+                  <a:srgbClr val="FFFFFF"/>
+                </a:solidFill>
+                <a:latin typeface="Calibri"/>
+              </a:rPr>
+              <a:t>Lohitha</a:t>
             </a:r>
           </a:p>
           <a:p>
@@ -3544,7 +3571,7 @@
               </a:spcAft>
             </a:pPr>
             <a:r>
-              <a:rPr sz="1600" b="1">
+              <a:rPr sz="1600" b="1" dirty="0">
                 <a:solidFill>
                   <a:srgbClr val="1F7A8C"/>
                 </a:solidFill>
@@ -3553,7 +3580,7 @@
               <a:t>▪  </a:t>
             </a:r>
             <a:r>
-              <a:rPr sz="1600" b="0" i="0">
+              <a:rPr sz="1600" b="0" i="0" dirty="0">
                 <a:solidFill>
                   <a:srgbClr val="FFFFFF"/>
                 </a:solidFill>
